--- a/kk-ngebut_slides.pptx
+++ b/kk-ngebut_slides.pptx
@@ -5,23 +5,23 @@
     <p:sldMasterId id="2147483648" r:id="rId1"/>
   </p:sldMasterIdLst>
   <p:sldIdLst>
-    <p:sldId id="256" r:id="rId7"/>
-    <p:sldId id="257" r:id="rId8"/>
-    <p:sldId id="258" r:id="rId9"/>
-    <p:sldId id="259" r:id="rId10"/>
-    <p:sldId id="260" r:id="rId11"/>
-    <p:sldId id="261" r:id="rId12"/>
-    <p:sldId id="262" r:id="rId13"/>
-    <p:sldId id="263" r:id="rId14"/>
-    <p:sldId id="264" r:id="rId15"/>
-    <p:sldId id="265" r:id="rId16"/>
-    <p:sldId id="266" r:id="rId17"/>
-    <p:sldId id="267" r:id="rId18"/>
-    <p:sldId id="268" r:id="rId19"/>
-    <p:sldId id="269" r:id="rId20"/>
-    <p:sldId id="270" r:id="rId21"/>
+    <p:sldId id="256" r:id="rId2"/>
+    <p:sldId id="257" r:id="rId3"/>
+    <p:sldId id="258" r:id="rId4"/>
+    <p:sldId id="259" r:id="rId5"/>
+    <p:sldId id="260" r:id="rId6"/>
+    <p:sldId id="261" r:id="rId7"/>
+    <p:sldId id="262" r:id="rId8"/>
+    <p:sldId id="263" r:id="rId9"/>
+    <p:sldId id="264" r:id="rId10"/>
+    <p:sldId id="265" r:id="rId11"/>
+    <p:sldId id="266" r:id="rId12"/>
+    <p:sldId id="267" r:id="rId13"/>
+    <p:sldId id="268" r:id="rId14"/>
+    <p:sldId id="269" r:id="rId15"/>
+    <p:sldId id="270" r:id="rId16"/>
   </p:sldIdLst>
-  <p:sldSz cx="12191695" cy="6858000" type="screen4x3"/>
+  <p:sldSz cx="12192000" cy="6858000"/>
   <p:notesSz cx="6858000" cy="9144000"/>
   <p:defaultTextStyle>
     <a:defPPr>
@@ -118,7 +118,1858 @@
       </a:defRPr>
     </a:lvl9pPr>
   </p:defaultTextStyle>
+  <p:extLst>
+    <p:ext uri="{EFAFB233-063F-42B5-8137-9DF3F51BA10A}">
+      <p15:sldGuideLst xmlns:p15="http://schemas.microsoft.com/office/powerpoint/2012/main">
+        <p15:guide id="1" orient="horz" pos="2160">
+          <p15:clr>
+            <a:srgbClr val="A4A3A4"/>
+          </p15:clr>
+        </p15:guide>
+        <p15:guide id="2" pos="2880">
+          <p15:clr>
+            <a:srgbClr val="A4A3A4"/>
+          </p15:clr>
+        </p15:guide>
+      </p15:sldGuideLst>
+    </p:ext>
+  </p:extLst>
 </p:presentation>
+</file>
+
+<file path=ppt/notesMasters/notesMaster1.xml><?xml version="1.0" encoding="utf-8"?>
+<p:notesMaster xmlns:a="http://schemas.openxmlformats.org/drawingml/2006/main" xmlns:p="http://schemas.openxmlformats.org/presentationml/2006/main" xmlns:r="http://schemas.openxmlformats.org/officeDocument/2006/relationships">
+  <p:cSld>
+    <p:bg>
+      <p:bgRef idx="1001">
+        <a:schemeClr val="bg1"/>
+      </p:bgRef>
+    </p:bg>
+    <p:spTree>
+      <p:nvGrpSpPr>
+        <p:cNvPr id="1" name=""/>
+        <p:cNvGrpSpPr/>
+        <p:nvPr/>
+      </p:nvGrpSpPr>
+      <p:grpSpPr>
+        <a:xfrm>
+          <a:off x="0" y="0"/>
+          <a:ext cx="0" cy="0"/>
+          <a:chOff x="0" y="0"/>
+          <a:chExt cx="0" cy="0"/>
+        </a:xfrm>
+      </p:grpSpPr>
+      <p:sp>
+        <p:nvSpPr>
+          <p:cNvPr id="2" name="Header Placeholder 1"/>
+          <p:cNvSpPr>
+            <a:spLocks noGrp="1"/>
+          </p:cNvSpPr>
+          <p:nvPr>
+            <p:ph type="hdr" sz="quarter"/>
+          </p:nvPr>
+        </p:nvSpPr>
+        <p:spPr>
+          <a:xfrm>
+            <a:off x="0" y="0"/>
+            <a:ext cx="2971800" cy="457200"/>
+          </a:xfrm>
+          <a:prstGeom prst="rect">
+            <a:avLst/>
+          </a:prstGeom>
+        </p:spPr>
+        <p:txBody>
+          <a:bodyPr vert="horz" lIns="91440" tIns="45720" rIns="91440" bIns="45720" rtlCol="0"/>
+          <a:lstStyle>
+            <a:lvl1pPr algn="l">
+              <a:defRPr sz="1200"/>
+            </a:lvl1pPr>
+          </a:lstStyle>
+          <a:p>
+            <a:endParaRPr lang="en-US"/>
+          </a:p>
+        </p:txBody>
+      </p:sp>
+      <p:sp>
+        <p:nvSpPr>
+          <p:cNvPr id="3" name="Date Placeholder 2"/>
+          <p:cNvSpPr>
+            <a:spLocks noGrp="1"/>
+          </p:cNvSpPr>
+          <p:nvPr>
+            <p:ph type="dt" idx="1"/>
+          </p:nvPr>
+        </p:nvSpPr>
+        <p:spPr>
+          <a:xfrm>
+            <a:off x="3884613" y="0"/>
+            <a:ext cx="2971800" cy="457200"/>
+          </a:xfrm>
+          <a:prstGeom prst="rect">
+            <a:avLst/>
+          </a:prstGeom>
+        </p:spPr>
+        <p:txBody>
+          <a:bodyPr vert="horz" lIns="91440" tIns="45720" rIns="91440" bIns="45720" rtlCol="0"/>
+          <a:lstStyle>
+            <a:lvl1pPr algn="r">
+              <a:defRPr sz="1200"/>
+            </a:lvl1pPr>
+          </a:lstStyle>
+          <a:p>
+            <a:fld id="{0F89C1C7-3DCD-1040-A9CF-14679D8B5DDD}" type="datetimeFigureOut">
+              <a:rPr lang="en-US" smtClean="0"/>
+              <a:t>10/17/16</a:t>
+            </a:fld>
+            <a:endParaRPr lang="en-US"/>
+          </a:p>
+        </p:txBody>
+      </p:sp>
+      <p:sp>
+        <p:nvSpPr>
+          <p:cNvPr id="4" name="Slide Image Placeholder 3"/>
+          <p:cNvSpPr>
+            <a:spLocks noGrp="1" noRot="1" noChangeAspect="1"/>
+          </p:cNvSpPr>
+          <p:nvPr>
+            <p:ph type="sldImg" idx="2"/>
+          </p:nvPr>
+        </p:nvSpPr>
+        <p:spPr>
+          <a:xfrm>
+            <a:off x="1143000" y="685800"/>
+            <a:ext cx="4572000" cy="3429000"/>
+          </a:xfrm>
+          <a:prstGeom prst="rect">
+            <a:avLst/>
+          </a:prstGeom>
+          <a:noFill/>
+          <a:ln w="12700">
+            <a:solidFill>
+              <a:prstClr val="black"/>
+            </a:solidFill>
+          </a:ln>
+        </p:spPr>
+        <p:txBody>
+          <a:bodyPr vert="horz" lIns="91440" tIns="45720" rIns="91440" bIns="45720" rtlCol="0" anchor="ctr"/>
+          <a:lstStyle/>
+          <a:p>
+            <a:endParaRPr lang="en-US"/>
+          </a:p>
+        </p:txBody>
+      </p:sp>
+      <p:sp>
+        <p:nvSpPr>
+          <p:cNvPr id="5" name="Notes Placeholder 4"/>
+          <p:cNvSpPr>
+            <a:spLocks noGrp="1"/>
+          </p:cNvSpPr>
+          <p:nvPr>
+            <p:ph type="body" sz="quarter" idx="3"/>
+          </p:nvPr>
+        </p:nvSpPr>
+        <p:spPr>
+          <a:xfrm>
+            <a:off x="685800" y="4343400"/>
+            <a:ext cx="5486400" cy="4114800"/>
+          </a:xfrm>
+          <a:prstGeom prst="rect">
+            <a:avLst/>
+          </a:prstGeom>
+        </p:spPr>
+        <p:txBody>
+          <a:bodyPr vert="horz" lIns="91440" tIns="45720" rIns="91440" bIns="45720" rtlCol="0"/>
+          <a:lstStyle/>
+          <a:p>
+            <a:pPr lvl="0"/>
+            <a:r>
+              <a:rPr lang="en-US" smtClean="0"/>
+              <a:t>Click to edit Master text styles</a:t>
+            </a:r>
+          </a:p>
+          <a:p>
+            <a:pPr lvl="1"/>
+            <a:r>
+              <a:rPr lang="en-US" smtClean="0"/>
+              <a:t>Second level</a:t>
+            </a:r>
+          </a:p>
+          <a:p>
+            <a:pPr lvl="2"/>
+            <a:r>
+              <a:rPr lang="en-US" smtClean="0"/>
+              <a:t>Third level</a:t>
+            </a:r>
+          </a:p>
+          <a:p>
+            <a:pPr lvl="3"/>
+            <a:r>
+              <a:rPr lang="en-US" smtClean="0"/>
+              <a:t>Fourth level</a:t>
+            </a:r>
+          </a:p>
+          <a:p>
+            <a:pPr lvl="4"/>
+            <a:r>
+              <a:rPr lang="en-US" smtClean="0"/>
+              <a:t>Fifth level</a:t>
+            </a:r>
+            <a:endParaRPr lang="en-US"/>
+          </a:p>
+        </p:txBody>
+      </p:sp>
+      <p:sp>
+        <p:nvSpPr>
+          <p:cNvPr id="6" name="Footer Placeholder 5"/>
+          <p:cNvSpPr>
+            <a:spLocks noGrp="1"/>
+          </p:cNvSpPr>
+          <p:nvPr>
+            <p:ph type="ftr" sz="quarter" idx="4"/>
+          </p:nvPr>
+        </p:nvSpPr>
+        <p:spPr>
+          <a:xfrm>
+            <a:off x="0" y="8685213"/>
+            <a:ext cx="2971800" cy="457200"/>
+          </a:xfrm>
+          <a:prstGeom prst="rect">
+            <a:avLst/>
+          </a:prstGeom>
+        </p:spPr>
+        <p:txBody>
+          <a:bodyPr vert="horz" lIns="91440" tIns="45720" rIns="91440" bIns="45720" rtlCol="0" anchor="b"/>
+          <a:lstStyle>
+            <a:lvl1pPr algn="l">
+              <a:defRPr sz="1200"/>
+            </a:lvl1pPr>
+          </a:lstStyle>
+          <a:p>
+            <a:endParaRPr lang="en-US"/>
+          </a:p>
+        </p:txBody>
+      </p:sp>
+      <p:sp>
+        <p:nvSpPr>
+          <p:cNvPr id="7" name="Slide Number Placeholder 6"/>
+          <p:cNvSpPr>
+            <a:spLocks noGrp="1"/>
+          </p:cNvSpPr>
+          <p:nvPr>
+            <p:ph type="sldNum" sz="quarter" idx="5"/>
+          </p:nvPr>
+        </p:nvSpPr>
+        <p:spPr>
+          <a:xfrm>
+            <a:off x="3884613" y="8685213"/>
+            <a:ext cx="2971800" cy="457200"/>
+          </a:xfrm>
+          <a:prstGeom prst="rect">
+            <a:avLst/>
+          </a:prstGeom>
+        </p:spPr>
+        <p:txBody>
+          <a:bodyPr vert="horz" lIns="91440" tIns="45720" rIns="91440" bIns="45720" rtlCol="0" anchor="b"/>
+          <a:lstStyle>
+            <a:lvl1pPr algn="r">
+              <a:defRPr sz="1200"/>
+            </a:lvl1pPr>
+          </a:lstStyle>
+          <a:p>
+            <a:fld id="{BB5E49A5-4136-284D-997B-48E1D791AD67}" type="slidenum">
+              <a:rPr lang="en-US" smtClean="0"/>
+              <a:t>‹#›</a:t>
+            </a:fld>
+            <a:endParaRPr lang="en-US"/>
+          </a:p>
+        </p:txBody>
+      </p:sp>
+    </p:spTree>
+    <p:extLst>
+      <p:ext uri="{BB962C8B-B14F-4D97-AF65-F5344CB8AC3E}">
+        <p14:creationId xmlns:p14="http://schemas.microsoft.com/office/powerpoint/2010/main" val="2623252185"/>
+      </p:ext>
+    </p:extLst>
+  </p:cSld>
+  <p:clrMap bg1="lt1" tx1="dk1" bg2="lt2" tx2="dk2" accent1="accent1" accent2="accent2" accent3="accent3" accent4="accent4" accent5="accent5" accent6="accent6" hlink="hlink" folHlink="folHlink"/>
+  <p:notesStyle>
+    <a:lvl1pPr marL="0" algn="l" defTabSz="457200" rtl="0" eaLnBrk="1" latinLnBrk="0" hangingPunct="1">
+      <a:defRPr sz="1200" kern="1200">
+        <a:solidFill>
+          <a:schemeClr val="tx1"/>
+        </a:solidFill>
+        <a:latin typeface="+mn-lt"/>
+        <a:ea typeface="+mn-ea"/>
+        <a:cs typeface="+mn-cs"/>
+      </a:defRPr>
+    </a:lvl1pPr>
+    <a:lvl2pPr marL="457200" algn="l" defTabSz="457200" rtl="0" eaLnBrk="1" latinLnBrk="0" hangingPunct="1">
+      <a:defRPr sz="1200" kern="1200">
+        <a:solidFill>
+          <a:schemeClr val="tx1"/>
+        </a:solidFill>
+        <a:latin typeface="+mn-lt"/>
+        <a:ea typeface="+mn-ea"/>
+        <a:cs typeface="+mn-cs"/>
+      </a:defRPr>
+    </a:lvl2pPr>
+    <a:lvl3pPr marL="914400" algn="l" defTabSz="457200" rtl="0" eaLnBrk="1" latinLnBrk="0" hangingPunct="1">
+      <a:defRPr sz="1200" kern="1200">
+        <a:solidFill>
+          <a:schemeClr val="tx1"/>
+        </a:solidFill>
+        <a:latin typeface="+mn-lt"/>
+        <a:ea typeface="+mn-ea"/>
+        <a:cs typeface="+mn-cs"/>
+      </a:defRPr>
+    </a:lvl3pPr>
+    <a:lvl4pPr marL="1371600" algn="l" defTabSz="457200" rtl="0" eaLnBrk="1" latinLnBrk="0" hangingPunct="1">
+      <a:defRPr sz="1200" kern="1200">
+        <a:solidFill>
+          <a:schemeClr val="tx1"/>
+        </a:solidFill>
+        <a:latin typeface="+mn-lt"/>
+        <a:ea typeface="+mn-ea"/>
+        <a:cs typeface="+mn-cs"/>
+      </a:defRPr>
+    </a:lvl4pPr>
+    <a:lvl5pPr marL="1828800" algn="l" defTabSz="457200" rtl="0" eaLnBrk="1" latinLnBrk="0" hangingPunct="1">
+      <a:defRPr sz="1200" kern="1200">
+        <a:solidFill>
+          <a:schemeClr val="tx1"/>
+        </a:solidFill>
+        <a:latin typeface="+mn-lt"/>
+        <a:ea typeface="+mn-ea"/>
+        <a:cs typeface="+mn-cs"/>
+      </a:defRPr>
+    </a:lvl5pPr>
+    <a:lvl6pPr marL="2286000" algn="l" defTabSz="457200" rtl="0" eaLnBrk="1" latinLnBrk="0" hangingPunct="1">
+      <a:defRPr sz="1200" kern="1200">
+        <a:solidFill>
+          <a:schemeClr val="tx1"/>
+        </a:solidFill>
+        <a:latin typeface="+mn-lt"/>
+        <a:ea typeface="+mn-ea"/>
+        <a:cs typeface="+mn-cs"/>
+      </a:defRPr>
+    </a:lvl6pPr>
+    <a:lvl7pPr marL="2743200" algn="l" defTabSz="457200" rtl="0" eaLnBrk="1" latinLnBrk="0" hangingPunct="1">
+      <a:defRPr sz="1200" kern="1200">
+        <a:solidFill>
+          <a:schemeClr val="tx1"/>
+        </a:solidFill>
+        <a:latin typeface="+mn-lt"/>
+        <a:ea typeface="+mn-ea"/>
+        <a:cs typeface="+mn-cs"/>
+      </a:defRPr>
+    </a:lvl7pPr>
+    <a:lvl8pPr marL="3200400" algn="l" defTabSz="457200" rtl="0" eaLnBrk="1" latinLnBrk="0" hangingPunct="1">
+      <a:defRPr sz="1200" kern="1200">
+        <a:solidFill>
+          <a:schemeClr val="tx1"/>
+        </a:solidFill>
+        <a:latin typeface="+mn-lt"/>
+        <a:ea typeface="+mn-ea"/>
+        <a:cs typeface="+mn-cs"/>
+      </a:defRPr>
+    </a:lvl8pPr>
+    <a:lvl9pPr marL="3657600" algn="l" defTabSz="457200" rtl="0" eaLnBrk="1" latinLnBrk="0" hangingPunct="1">
+      <a:defRPr sz="1200" kern="1200">
+        <a:solidFill>
+          <a:schemeClr val="tx1"/>
+        </a:solidFill>
+        <a:latin typeface="+mn-lt"/>
+        <a:ea typeface="+mn-ea"/>
+        <a:cs typeface="+mn-cs"/>
+      </a:defRPr>
+    </a:lvl9pPr>
+  </p:notesStyle>
+</p:notesMaster>
+</file>
+
+<file path=ppt/notesSlides/notesSlide1.xml><?xml version="1.0" encoding="utf-8"?>
+<p:notes xmlns:a="http://schemas.openxmlformats.org/drawingml/2006/main" xmlns:p="http://schemas.openxmlformats.org/presentationml/2006/main" xmlns:r="http://schemas.openxmlformats.org/officeDocument/2006/relationships">
+  <p:cSld>
+    <p:spTree>
+      <p:nvGrpSpPr>
+        <p:cNvPr id="1" name=""/>
+        <p:cNvGrpSpPr/>
+        <p:nvPr/>
+      </p:nvGrpSpPr>
+      <p:grpSpPr>
+        <a:xfrm>
+          <a:off x="0" y="0"/>
+          <a:ext cx="0" cy="0"/>
+          <a:chOff x="0" y="0"/>
+          <a:chExt cx="0" cy="0"/>
+        </a:xfrm>
+      </p:grpSpPr>
+      <p:sp>
+        <p:nvSpPr>
+          <p:cNvPr id="2" name="Slide Image Placeholder 1"/>
+          <p:cNvSpPr>
+            <a:spLocks noGrp="1"/>
+          </p:cNvSpPr>
+          <p:nvPr>
+            <p:ph type="sldImg" idx="2"/>
+          </p:nvPr>
+        </p:nvSpPr>
+        <p:spPr/>
+      </p:sp>
+      <p:sp>
+        <p:nvSpPr>
+          <p:cNvPr id="3" name="Notes Placeholder 2"/>
+          <p:cNvSpPr>
+            <a:spLocks noGrp="1"/>
+          </p:cNvSpPr>
+          <p:nvPr>
+            <p:ph type="body" idx="3" sz="quarter"/>
+          </p:nvPr>
+        </p:nvSpPr>
+        <p:spPr/>
+        <p:txBody>
+          <a:bodyPr/>
+          <a:lstStyle/>
+          <a:p>
+            <a:r>
+              <a:rPr sz="1100"/>
+              <a:t>Selamat pagi/siang/sore Bapak/Ibu juri dan rekan-rekan sekalian.</a:t>
+            </a:r>
+          </a:p>
+          <a:p>
+            <a:r>
+              <a:rPr sz="1100"/>
+              <a:t>Perkenalkan, kami dari Master Program Informatika, Fakultas Teknologi Elektro dan Informatika Cerdas, Institut Teknologi Sepuluh Nopember Surabaya.</a:t>
+            </a:r>
+          </a:p>
+          <a:p>
+            <a:r>
+              <a:rPr sz="1100"/>
+              <a:t>Hari ini kami akan mempresentasikan penelitian kami yang berjudul "Explainable Machine Learning with Counterfactual Analysis and GenAI Naturalization for Stress Prediction and Intervention Using Sleep and Lifestyle Data".</a:t>
+            </a:r>
+          </a:p>
+          <a:p>
+            <a:r>
+              <a:rPr sz="1100"/>
+              <a:t>Penelitian ini mengintegrasikan empat tahap: prediksi stres, penjelasan model, rekomendasi intervensi, dan naturalisasi hasil dalam bahasa awam.</a:t>
+            </a:r>
+          </a:p>
+        </p:txBody>
+      </p:sp>
+      <p:sp>
+        <p:nvSpPr>
+          <p:cNvPr id="4" name="Slide Number Placeholder 3"/>
+          <p:cNvSpPr>
+            <a:spLocks noGrp="1"/>
+          </p:cNvSpPr>
+          <p:nvPr>
+            <p:ph type="sldNum" idx="5" sz="quarter"/>
+          </p:nvPr>
+        </p:nvSpPr>
+        <p:spPr/>
+      </p:sp>
+    </p:spTree>
+  </p:cSld>
+  <p:clrMapOvr>
+    <a:masterClrMapping/>
+  </p:clrMapOvr>
+</p:notes>
+</file>
+
+<file path=ppt/notesSlides/notesSlide10.xml><?xml version="1.0" encoding="utf-8"?>
+<p:notes xmlns:a="http://schemas.openxmlformats.org/drawingml/2006/main" xmlns:p="http://schemas.openxmlformats.org/presentationml/2006/main" xmlns:r="http://schemas.openxmlformats.org/officeDocument/2006/relationships">
+  <p:cSld>
+    <p:spTree>
+      <p:nvGrpSpPr>
+        <p:cNvPr id="1" name=""/>
+        <p:cNvGrpSpPr/>
+        <p:nvPr/>
+      </p:nvGrpSpPr>
+      <p:grpSpPr>
+        <a:xfrm>
+          <a:off x="0" y="0"/>
+          <a:ext cx="0" cy="0"/>
+          <a:chOff x="0" y="0"/>
+          <a:chExt cx="0" cy="0"/>
+        </a:xfrm>
+      </p:grpSpPr>
+      <p:sp>
+        <p:nvSpPr>
+          <p:cNvPr id="2" name="Slide Image Placeholder 1"/>
+          <p:cNvSpPr>
+            <a:spLocks noGrp="1"/>
+          </p:cNvSpPr>
+          <p:nvPr>
+            <p:ph type="sldImg" idx="2"/>
+          </p:nvPr>
+        </p:nvSpPr>
+        <p:spPr/>
+      </p:sp>
+      <p:sp>
+        <p:nvSpPr>
+          <p:cNvPr id="3" name="Notes Placeholder 2"/>
+          <p:cNvSpPr>
+            <a:spLocks noGrp="1"/>
+          </p:cNvSpPr>
+          <p:nvPr>
+            <p:ph type="body" idx="3" sz="quarter"/>
+          </p:nvPr>
+        </p:nvSpPr>
+        <p:spPr/>
+        <p:txBody>
+          <a:bodyPr/>
+          <a:lstStyle/>
+          <a:p>
+            <a:r>
+              <a:rPr sz="1100"/>
+              <a:t>Tahap terakhir adalah naturalisasi pakai GPT-4o-mini.</a:t>
+            </a:r>
+          </a:p>
+          <a:p>
+            <a:r>
+              <a:rPr sz="1100"/>
+              <a:t>Input GPT: top-5 fitur SHAP, perubahan counterfactual, dan profil pengguna. Output: JSON terstruktur dengan 5 field — summary, drivers, recommendations dengan action/target/rationale, encouragement, dan disclaimer.</a:t>
+            </a:r>
+          </a:p>
+          <a:p>
+            <a:r>
+              <a:rPr sz="1100"/>
+              <a:t>API call dengan temperature 0.3 untuk determinism, response_format JSON object untuk parsing reliable.</a:t>
+            </a:r>
+          </a:p>
+          <a:p>
+            <a:r>
+              <a:rPr sz="1100"/>
+              <a:t>Yang krusial: 3 layer validasi post-generation dengan max 3 retry.</a:t>
+            </a:r>
+          </a:p>
+          <a:p>
+            <a:r>
+              <a:rPr sz="1100"/>
+              <a:t>Layer A: safety filter regex — blokir kata "obat", "diagnosa", "menjamin", "mulai minum alkohol", dan sejenisnya.</a:t>
+            </a:r>
+          </a:p>
+          <a:p>
+            <a:r>
+              <a:rPr sz="1100"/>
+              <a:t>Layer B: faithfulness check — yang ini novel. Recommendations harus mention angka EXACT dari counterfactual, dan tidak boleh suggest perubahan pada locked outcome features.</a:t>
+            </a:r>
+          </a:p>
+          <a:p>
+            <a:r>
+              <a:rPr sz="1100"/>
+              <a:t>Layer C: structural validation — semua required keys harus ada.</a:t>
+            </a:r>
+          </a:p>
+          <a:p>
+            <a:r>
+              <a:rPr sz="1100"/>
+              <a:t>Output yang gagal retry sampai 3x sebelum fallback ke dummy.</a:t>
+            </a:r>
+          </a:p>
+        </p:txBody>
+      </p:sp>
+      <p:sp>
+        <p:nvSpPr>
+          <p:cNvPr id="4" name="Slide Number Placeholder 3"/>
+          <p:cNvSpPr>
+            <a:spLocks noGrp="1"/>
+          </p:cNvSpPr>
+          <p:nvPr>
+            <p:ph type="sldNum" idx="5" sz="quarter"/>
+          </p:nvPr>
+        </p:nvSpPr>
+        <p:spPr/>
+      </p:sp>
+    </p:spTree>
+  </p:cSld>
+  <p:clrMapOvr>
+    <a:masterClrMapping/>
+  </p:clrMapOvr>
+</p:notes>
+</file>
+
+<file path=ppt/notesSlides/notesSlide11.xml><?xml version="1.0" encoding="utf-8"?>
+<p:notes xmlns:a="http://schemas.openxmlformats.org/drawingml/2006/main" xmlns:p="http://schemas.openxmlformats.org/presentationml/2006/main" xmlns:r="http://schemas.openxmlformats.org/officeDocument/2006/relationships">
+  <p:cSld>
+    <p:spTree>
+      <p:nvGrpSpPr>
+        <p:cNvPr id="1" name=""/>
+        <p:cNvGrpSpPr/>
+        <p:nvPr/>
+      </p:nvGrpSpPr>
+      <p:grpSpPr>
+        <a:xfrm>
+          <a:off x="0" y="0"/>
+          <a:ext cx="0" cy="0"/>
+          <a:chOff x="0" y="0"/>
+          <a:chExt cx="0" cy="0"/>
+        </a:xfrm>
+      </p:grpSpPr>
+      <p:sp>
+        <p:nvSpPr>
+          <p:cNvPr id="2" name="Slide Image Placeholder 1"/>
+          <p:cNvSpPr>
+            <a:spLocks noGrp="1"/>
+          </p:cNvSpPr>
+          <p:nvPr>
+            <p:ph type="sldImg" idx="2"/>
+          </p:nvPr>
+        </p:nvSpPr>
+        <p:spPr/>
+      </p:sp>
+      <p:sp>
+        <p:nvSpPr>
+          <p:cNvPr id="3" name="Notes Placeholder 2"/>
+          <p:cNvSpPr>
+            <a:spLocks noGrp="1"/>
+          </p:cNvSpPr>
+          <p:nvPr>
+            <p:ph type="body" idx="3" sz="quarter"/>
+          </p:nvPr>
+        </p:nvSpPr>
+        <p:spPr/>
+        <p:txBody>
+          <a:bodyPr/>
+          <a:lstStyle/>
+          <a:p>
+            <a:r>
+              <a:rPr sz="1100"/>
+              <a:t>Hasil evaluasi CF pada 40 test instance, 10 per stress quartile.</a:t>
+            </a:r>
+          </a:p>
+          <a:p>
+            <a:r>
+              <a:rPr sz="1100"/>
+              <a:t>Dari 40 instance, 25 berhasil generate CF valid — 62.5 persen success rate. Yang berhasil, semuanya 100 persen valid (memang reach target range), dan 100 persen plausible (dalam permitted_range).</a:t>
+            </a:r>
+          </a:p>
+          <a:p>
+            <a:r>
+              <a:rPr sz="1100"/>
+              <a:t>Mean proximity 0.226 — relatif rendah, artinya CF tidak terlalu jauh dari original. Sparsity 4.65 — sekitar 4-5 fitur diubah per CF, masih masuk akal untuk pengguna.</a:t>
+            </a:r>
+          </a:p>
+          <a:p>
+            <a:r>
+              <a:rPr sz="1100"/>
+              <a:t>Success balanced antar quartile: 7, 6, 6, 6. Tidak biased ke level stress tertentu.</a:t>
+            </a:r>
+          </a:p>
+          <a:p>
+            <a:r>
+              <a:rPr sz="1100"/>
+              <a:t>Yang harus saya disclose: 62.5 persen memang di bawah target awal 80 persen. Ini bukan kegagalan, melainkan KONSEKUENSI dari restriksi causal kami. Karena kami lock outcome features, model hanya punya behavior features untuk digeser — yang impact-nya memang lebih kecil.</a:t>
+            </a:r>
+          </a:p>
+          <a:p>
+            <a:r>
+              <a:rPr sz="1100"/>
+              <a:t>Ini adalah trade-off yang kami diskusi di limitations: causal validity vs success rate.</a:t>
+            </a:r>
+          </a:p>
+        </p:txBody>
+      </p:sp>
+      <p:sp>
+        <p:nvSpPr>
+          <p:cNvPr id="4" name="Slide Number Placeholder 3"/>
+          <p:cNvSpPr>
+            <a:spLocks noGrp="1"/>
+          </p:cNvSpPr>
+          <p:nvPr>
+            <p:ph type="sldNum" idx="5" sz="quarter"/>
+          </p:nvPr>
+        </p:nvSpPr>
+        <p:spPr/>
+      </p:sp>
+    </p:spTree>
+  </p:cSld>
+  <p:clrMapOvr>
+    <a:masterClrMapping/>
+  </p:clrMapOvr>
+</p:notes>
+</file>
+
+<file path=ppt/notesSlides/notesSlide12.xml><?xml version="1.0" encoding="utf-8"?>
+<p:notes xmlns:a="http://schemas.openxmlformats.org/drawingml/2006/main" xmlns:p="http://schemas.openxmlformats.org/presentationml/2006/main" xmlns:r="http://schemas.openxmlformats.org/officeDocument/2006/relationships">
+  <p:cSld>
+    <p:spTree>
+      <p:nvGrpSpPr>
+        <p:cNvPr id="1" name=""/>
+        <p:cNvGrpSpPr/>
+        <p:nvPr/>
+      </p:nvGrpSpPr>
+      <p:grpSpPr>
+        <a:xfrm>
+          <a:off x="0" y="0"/>
+          <a:ext cx="0" cy="0"/>
+          <a:chOff x="0" y="0"/>
+          <a:chExt cx="0" cy="0"/>
+        </a:xfrm>
+      </p:grpSpPr>
+      <p:sp>
+        <p:nvSpPr>
+          <p:cNvPr id="2" name="Slide Image Placeholder 1"/>
+          <p:cNvSpPr>
+            <a:spLocks noGrp="1"/>
+          </p:cNvSpPr>
+          <p:nvPr>
+            <p:ph type="sldImg" idx="2"/>
+          </p:nvPr>
+        </p:nvSpPr>
+        <p:spPr/>
+      </p:sp>
+      <p:sp>
+        <p:nvSpPr>
+          <p:cNvPr id="3" name="Notes Placeholder 2"/>
+          <p:cNvSpPr>
+            <a:spLocks noGrp="1"/>
+          </p:cNvSpPr>
+          <p:nvPr>
+            <p:ph type="body" idx="3" sz="quarter"/>
+          </p:nvPr>
+        </p:nvSpPr>
+        <p:spPr/>
+        <p:txBody>
+          <a:bodyPr/>
+          <a:lstStyle/>
+          <a:p>
+            <a:r>
+              <a:rPr sz="1100"/>
+              <a:t>Tiga individu dipilih sebagai case study berdasarkan stress_score actual: low ~3, mid ~6, high ~8.5.</a:t>
+            </a:r>
+          </a:p>
+          <a:p>
+            <a:r>
+              <a:rPr sz="1100"/>
+              <a:t>Semua tiga berhasil dapat CF dengan delta yang meaningful: -0.21 untuk low stress, -0.30 untuk mid, dan -0.38 untuk high.</a:t>
+            </a:r>
+          </a:p>
+          <a:p>
+            <a:r>
+              <a:rPr sz="1100"/>
+              <a:t>Contoh output GenAI untuk HIGH stress case sangat menarik.</a:t>
+            </a:r>
+          </a:p>
+          <a:p>
+            <a:r>
+              <a:rPr sz="1100"/>
+              <a:t>Action 1: kurangi durasi tidur — ini counter-intuitif domain tapi sesuai output DiCE. Honest reporting.</a:t>
+            </a:r>
+          </a:p>
+          <a:p>
+            <a:r>
+              <a:rPr sz="1100"/>
+              <a:t>Action 2: tingkatkan screen time — ini artifact model yang sebenarnya harus dibahas di limitation, karena tidak align dengan medical knowledge. Ini bukti perlunya domain expert review.</a:t>
+            </a:r>
+          </a:p>
+          <a:p>
+            <a:r>
+              <a:rPr sz="1100"/>
+              <a:t>Action 3: hilangkan alkohol dari 4 unit menjadi 0 — ini intervention yang sangat valid dan klinis benar.</a:t>
+            </a:r>
+          </a:p>
+          <a:p>
+            <a:r>
+              <a:rPr sz="1100"/>
+              <a:t>Action 4: turunkan suhu ruangan — masuk akal untuk kualitas tidur.</a:t>
+            </a:r>
+          </a:p>
+          <a:p>
+            <a:r>
+              <a:rPr sz="1100"/>
+              <a:t>Yang penting: semua rekomendasi PASS faithfulness validation — angka exact match dengan CF, arah verb benar, tidak ada feature locked yang muncul sebagai action.</a:t>
+            </a:r>
+          </a:p>
+        </p:txBody>
+      </p:sp>
+      <p:sp>
+        <p:nvSpPr>
+          <p:cNvPr id="4" name="Slide Number Placeholder 3"/>
+          <p:cNvSpPr>
+            <a:spLocks noGrp="1"/>
+          </p:cNvSpPr>
+          <p:nvPr>
+            <p:ph type="sldNum" idx="5" sz="quarter"/>
+          </p:nvPr>
+        </p:nvSpPr>
+        <p:spPr/>
+      </p:sp>
+    </p:spTree>
+  </p:cSld>
+  <p:clrMapOvr>
+    <a:masterClrMapping/>
+  </p:clrMapOvr>
+</p:notes>
+</file>
+
+<file path=ppt/notesSlides/notesSlide13.xml><?xml version="1.0" encoding="utf-8"?>
+<p:notes xmlns:a="http://schemas.openxmlformats.org/drawingml/2006/main" xmlns:p="http://schemas.openxmlformats.org/presentationml/2006/main" xmlns:r="http://schemas.openxmlformats.org/officeDocument/2006/relationships">
+  <p:cSld>
+    <p:spTree>
+      <p:nvGrpSpPr>
+        <p:cNvPr id="1" name=""/>
+        <p:cNvGrpSpPr/>
+        <p:nvPr/>
+      </p:nvGrpSpPr>
+      <p:grpSpPr>
+        <a:xfrm>
+          <a:off x="0" y="0"/>
+          <a:ext cx="0" cy="0"/>
+          <a:chOff x="0" y="0"/>
+          <a:chExt cx="0" cy="0"/>
+        </a:xfrm>
+      </p:grpSpPr>
+      <p:sp>
+        <p:nvSpPr>
+          <p:cNvPr id="2" name="Slide Image Placeholder 1"/>
+          <p:cNvSpPr>
+            <a:spLocks noGrp="1"/>
+          </p:cNvSpPr>
+          <p:nvPr>
+            <p:ph type="sldImg" idx="2"/>
+          </p:nvPr>
+        </p:nvSpPr>
+        <p:spPr/>
+      </p:sp>
+      <p:sp>
+        <p:nvSpPr>
+          <p:cNvPr id="3" name="Notes Placeholder 2"/>
+          <p:cNvSpPr>
+            <a:spLocks noGrp="1"/>
+          </p:cNvSpPr>
+          <p:nvPr>
+            <p:ph type="body" idx="3" sz="quarter"/>
+          </p:nvPr>
+        </p:nvSpPr>
+        <p:spPr/>
+        <p:txBody>
+          <a:bodyPr/>
+          <a:lstStyle/>
+          <a:p>
+            <a:r>
+              <a:rPr sz="1100"/>
+              <a:t>Kami harus jujur soal keterbatasan.</a:t>
+            </a:r>
+          </a:p>
+          <a:p>
+            <a:r>
+              <a:rPr sz="1100"/>
+              <a:t>Pertama dan paling penting: dataset SINTETIS, bukan dari subjek manusia nyata. Korelasi yang kami temukan bisa jadi artifact generator data. Untuk generalisasi ke populasi klinis, perlu validasi data real.</a:t>
+            </a:r>
+          </a:p>
+          <a:p>
+            <a:r>
+              <a:rPr sz="1100"/>
+              <a:t>Kedua: DiCE mengasumsikan causal stationarity. Pada data sintetis, asumsi ini tidak terjamin. Rekomendasi kami sebaiknya dipahami sebagai "kemungkinan" di bawah model yang dipelajari, bukan "kepastian" causal.</a:t>
+            </a:r>
+          </a:p>
+          <a:p>
+            <a:r>
+              <a:rPr sz="1100"/>
+              <a:t>Ketiga: evaluasi GenAI terbatas. Hanya structural validation, safety regex, dan basic faithfulness check. Tidak ada user study, expert panel, atau automated NLI-based scoring.</a:t>
+            </a:r>
+          </a:p>
+          <a:p>
+            <a:r>
+              <a:rPr sz="1100"/>
+              <a:t>Keempat: reproducibility ada bound-nya — DiCE genetic stokastik, GPT probabilistik. Meski random state dan temperature di-fix, variasi minor mungkin terjadi.</a:t>
+            </a:r>
+          </a:p>
+          <a:p>
+            <a:r>
+              <a:rPr sz="1100"/>
+              <a:t>Kelima: effect size modest — sekitar 0.3 poin per CF. Untuk substantial reduction, mungkin perlu intervensi via outcome physiological, bukan hanya behavior.</a:t>
+            </a:r>
+          </a:p>
+        </p:txBody>
+      </p:sp>
+      <p:sp>
+        <p:nvSpPr>
+          <p:cNvPr id="4" name="Slide Number Placeholder 3"/>
+          <p:cNvSpPr>
+            <a:spLocks noGrp="1"/>
+          </p:cNvSpPr>
+          <p:nvPr>
+            <p:ph type="sldNum" idx="5" sz="quarter"/>
+          </p:nvPr>
+        </p:nvSpPr>
+        <p:spPr/>
+      </p:sp>
+    </p:spTree>
+  </p:cSld>
+  <p:clrMapOvr>
+    <a:masterClrMapping/>
+  </p:clrMapOvr>
+</p:notes>
+</file>
+
+<file path=ppt/notesSlides/notesSlide14.xml><?xml version="1.0" encoding="utf-8"?>
+<p:notes xmlns:a="http://schemas.openxmlformats.org/drawingml/2006/main" xmlns:p="http://schemas.openxmlformats.org/presentationml/2006/main" xmlns:r="http://schemas.openxmlformats.org/officeDocument/2006/relationships">
+  <p:cSld>
+    <p:spTree>
+      <p:nvGrpSpPr>
+        <p:cNvPr id="1" name=""/>
+        <p:cNvGrpSpPr/>
+        <p:nvPr/>
+      </p:nvGrpSpPr>
+      <p:grpSpPr>
+        <a:xfrm>
+          <a:off x="0" y="0"/>
+          <a:ext cx="0" cy="0"/>
+          <a:chOff x="0" y="0"/>
+          <a:chExt cx="0" cy="0"/>
+        </a:xfrm>
+      </p:grpSpPr>
+      <p:sp>
+        <p:nvSpPr>
+          <p:cNvPr id="2" name="Slide Image Placeholder 1"/>
+          <p:cNvSpPr>
+            <a:spLocks noGrp="1"/>
+          </p:cNvSpPr>
+          <p:nvPr>
+            <p:ph type="sldImg" idx="2"/>
+          </p:nvPr>
+        </p:nvSpPr>
+        <p:spPr/>
+      </p:sp>
+      <p:sp>
+        <p:nvSpPr>
+          <p:cNvPr id="3" name="Notes Placeholder 2"/>
+          <p:cNvSpPr>
+            <a:spLocks noGrp="1"/>
+          </p:cNvSpPr>
+          <p:nvPr>
+            <p:ph type="body" idx="3" sz="quarter"/>
+          </p:nvPr>
+        </p:nvSpPr>
+        <p:spPr/>
+        <p:txBody>
+          <a:bodyPr/>
+          <a:lstStyle/>
+          <a:p>
+            <a:r>
+              <a:rPr sz="1100"/>
+              <a:t>Lima arah ke depan.</a:t>
+            </a:r>
+          </a:p>
+          <a:p>
+            <a:r>
+              <a:rPr sz="1100"/>
+              <a:t>Pertama, two-stage causal architecture. Stage 1 prediksi outcome dari behavior, Stage 2 prediksi stress dari outcome. Ini bisa capture indirect effect yang behavior-only tidak bisa.</a:t>
+            </a:r>
+          </a:p>
+          <a:p>
+            <a:r>
+              <a:rPr sz="1100"/>
+              <a:t>Kedua, automated faithfulness scoring untuk GenAI menggunakan NLI-based entailment check antara CF facts dan GPT narrative. Lebih rigorous dari regex.</a:t>
+            </a:r>
+          </a:p>
+          <a:p>
+            <a:r>
+              <a:rPr sz="1100"/>
+              <a:t>Ketiga, validasi data nyata. Wearable sensor + self-report longitudinal study dengan IRB approval dan kerjasama klinis.</a:t>
+            </a:r>
+          </a:p>
+          <a:p>
+            <a:r>
+              <a:rPr sz="1100"/>
+              <a:t>Keempat, user study — A/B test antara teknis CF vs naturalized recommendation untuk mengukur perceived usefulness dan clarity.</a:t>
+            </a:r>
+          </a:p>
+          <a:p>
+            <a:r>
+              <a:rPr sz="1100"/>
+              <a:t>Kelima, integrasi dengan conversational interface — chat-based intervention dengan follow-up questions, bukan one-shot recommendation.</a:t>
+            </a:r>
+          </a:p>
+        </p:txBody>
+      </p:sp>
+      <p:sp>
+        <p:nvSpPr>
+          <p:cNvPr id="4" name="Slide Number Placeholder 3"/>
+          <p:cNvSpPr>
+            <a:spLocks noGrp="1"/>
+          </p:cNvSpPr>
+          <p:nvPr>
+            <p:ph type="sldNum" idx="5" sz="quarter"/>
+          </p:nvPr>
+        </p:nvSpPr>
+        <p:spPr/>
+      </p:sp>
+    </p:spTree>
+  </p:cSld>
+  <p:clrMapOvr>
+    <a:masterClrMapping/>
+  </p:clrMapOvr>
+</p:notes>
+</file>
+
+<file path=ppt/notesSlides/notesSlide15.xml><?xml version="1.0" encoding="utf-8"?>
+<p:notes xmlns:a="http://schemas.openxmlformats.org/drawingml/2006/main" xmlns:p="http://schemas.openxmlformats.org/presentationml/2006/main" xmlns:r="http://schemas.openxmlformats.org/officeDocument/2006/relationships">
+  <p:cSld>
+    <p:spTree>
+      <p:nvGrpSpPr>
+        <p:cNvPr id="1" name=""/>
+        <p:cNvGrpSpPr/>
+        <p:nvPr/>
+      </p:nvGrpSpPr>
+      <p:grpSpPr>
+        <a:xfrm>
+          <a:off x="0" y="0"/>
+          <a:ext cx="0" cy="0"/>
+          <a:chOff x="0" y="0"/>
+          <a:chExt cx="0" cy="0"/>
+        </a:xfrm>
+      </p:grpSpPr>
+      <p:sp>
+        <p:nvSpPr>
+          <p:cNvPr id="2" name="Slide Image Placeholder 1"/>
+          <p:cNvSpPr>
+            <a:spLocks noGrp="1"/>
+          </p:cNvSpPr>
+          <p:nvPr>
+            <p:ph type="sldImg" idx="2"/>
+          </p:nvPr>
+        </p:nvSpPr>
+        <p:spPr/>
+      </p:sp>
+      <p:sp>
+        <p:nvSpPr>
+          <p:cNvPr id="3" name="Notes Placeholder 2"/>
+          <p:cNvSpPr>
+            <a:spLocks noGrp="1"/>
+          </p:cNvSpPr>
+          <p:nvPr>
+            <p:ph type="body" idx="3" sz="quarter"/>
+          </p:nvPr>
+        </p:nvSpPr>
+        <p:spPr/>
+        <p:txBody>
+          <a:bodyPr/>
+          <a:lstStyle/>
+          <a:p>
+            <a:r>
+              <a:rPr sz="1100"/>
+              <a:t>Kesimpulan.</a:t>
+            </a:r>
+          </a:p>
+          <a:p>
+            <a:r>
+              <a:rPr sz="1100"/>
+              <a:t>Kami berhasil membangun framework end-to-end yang mengintegrasikan empat tahap: prediksi, explanation, prescription, dan naturalization.</a:t>
+            </a:r>
+          </a:p>
+          <a:p>
+            <a:r>
+              <a:rPr sz="1100"/>
+              <a:t>Bukti empiris dari penelitian: CatBoost R² 0.6503, MAE 0.7584, dan 5-Fold CV 0.6266 dengan variansi sangat kecil. SHAP domain validity teruji dengan korelasi -0.996. Counterfactual success 62.5 persen, plausibility 100 persen. GenAI naturalisasi sukses untuk semua tiga case study dengan safety dan faithfulness validation pass.</a:t>
+            </a:r>
+          </a:p>
+          <a:p>
+            <a:r>
+              <a:rPr sz="1100"/>
+              <a:t>Kontribusi utama: pipeline prescriptive ML yang lengkap, causally aware, dan safety validated — siap untuk validasi lanjutan di setting klinis, wearable, atau longitudinal.</a:t>
+            </a:r>
+          </a:p>
+          <a:p>
+            <a:r>
+              <a:rPr sz="1100"/>
+              <a:t>Terima kasih atas perhatiannya, dan kami terbuka untuk pertanyaan atau diskusi.</a:t>
+            </a:r>
+          </a:p>
+        </p:txBody>
+      </p:sp>
+      <p:sp>
+        <p:nvSpPr>
+          <p:cNvPr id="4" name="Slide Number Placeholder 3"/>
+          <p:cNvSpPr>
+            <a:spLocks noGrp="1"/>
+          </p:cNvSpPr>
+          <p:nvPr>
+            <p:ph type="sldNum" idx="5" sz="quarter"/>
+          </p:nvPr>
+        </p:nvSpPr>
+        <p:spPr/>
+      </p:sp>
+    </p:spTree>
+  </p:cSld>
+  <p:clrMapOvr>
+    <a:masterClrMapping/>
+  </p:clrMapOvr>
+</p:notes>
+</file>
+
+<file path=ppt/notesSlides/notesSlide2.xml><?xml version="1.0" encoding="utf-8"?>
+<p:notes xmlns:a="http://schemas.openxmlformats.org/drawingml/2006/main" xmlns:p="http://schemas.openxmlformats.org/presentationml/2006/main" xmlns:r="http://schemas.openxmlformats.org/officeDocument/2006/relationships">
+  <p:cSld>
+    <p:spTree>
+      <p:nvGrpSpPr>
+        <p:cNvPr id="1" name=""/>
+        <p:cNvGrpSpPr/>
+        <p:nvPr/>
+      </p:nvGrpSpPr>
+      <p:grpSpPr>
+        <a:xfrm>
+          <a:off x="0" y="0"/>
+          <a:ext cx="0" cy="0"/>
+          <a:chOff x="0" y="0"/>
+          <a:chExt cx="0" cy="0"/>
+        </a:xfrm>
+      </p:grpSpPr>
+      <p:sp>
+        <p:nvSpPr>
+          <p:cNvPr id="2" name="Slide Image Placeholder 1"/>
+          <p:cNvSpPr>
+            <a:spLocks noGrp="1"/>
+          </p:cNvSpPr>
+          <p:nvPr>
+            <p:ph type="sldImg" idx="2"/>
+          </p:nvPr>
+        </p:nvSpPr>
+        <p:spPr/>
+      </p:sp>
+      <p:sp>
+        <p:nvSpPr>
+          <p:cNvPr id="3" name="Notes Placeholder 2"/>
+          <p:cNvSpPr>
+            <a:spLocks noGrp="1"/>
+          </p:cNvSpPr>
+          <p:nvPr>
+            <p:ph type="body" idx="3" sz="quarter"/>
+          </p:nvPr>
+        </p:nvSpPr>
+        <p:spPr/>
+        <p:txBody>
+          <a:bodyPr/>
+          <a:lstStyle/>
+          <a:p>
+            <a:r>
+              <a:rPr sz="1100"/>
+              <a:t>Presentasi ini saya bagi ke beberapa bagian.</a:t>
+            </a:r>
+          </a:p>
+          <a:p>
+            <a:r>
+              <a:rPr sz="1100"/>
+              <a:t>Mulai dari latar belakang dan motivasi, lalu gap penelitian dan kontribusi yang kami tawarkan. Kemudian saya jelaskan framework 4-tahap yang kami usulkan beserta dataset dan metodologi setiap tahapnya.</a:t>
+            </a:r>
+          </a:p>
+          <a:p>
+            <a:r>
+              <a:rPr sz="1100"/>
+              <a:t>Setelah itu masuk ke hasil — performa model, analisis SHAP, kualitas counterfactual, dan tiga studi kasus individu. Diakhiri dengan keterbatasan, arah ke depan, dan kesimpulan.</a:t>
+            </a:r>
+          </a:p>
+          <a:p>
+            <a:r>
+              <a:rPr sz="1100"/>
+              <a:t>Total estimasi waktu sekitar 15 menit, sisa untuk diskusi.</a:t>
+            </a:r>
+          </a:p>
+        </p:txBody>
+      </p:sp>
+      <p:sp>
+        <p:nvSpPr>
+          <p:cNvPr id="4" name="Slide Number Placeholder 3"/>
+          <p:cNvSpPr>
+            <a:spLocks noGrp="1"/>
+          </p:cNvSpPr>
+          <p:nvPr>
+            <p:ph type="sldNum" idx="5" sz="quarter"/>
+          </p:nvPr>
+        </p:nvSpPr>
+        <p:spPr/>
+      </p:sp>
+    </p:spTree>
+  </p:cSld>
+  <p:clrMapOvr>
+    <a:masterClrMapping/>
+  </p:clrMapOvr>
+</p:notes>
+</file>
+
+<file path=ppt/notesSlides/notesSlide3.xml><?xml version="1.0" encoding="utf-8"?>
+<p:notes xmlns:a="http://schemas.openxmlformats.org/drawingml/2006/main" xmlns:p="http://schemas.openxmlformats.org/presentationml/2006/main" xmlns:r="http://schemas.openxmlformats.org/officeDocument/2006/relationships">
+  <p:cSld>
+    <p:spTree>
+      <p:nvGrpSpPr>
+        <p:cNvPr id="1" name=""/>
+        <p:cNvGrpSpPr/>
+        <p:nvPr/>
+      </p:nvGrpSpPr>
+      <p:grpSpPr>
+        <a:xfrm>
+          <a:off x="0" y="0"/>
+          <a:ext cx="0" cy="0"/>
+          <a:chOff x="0" y="0"/>
+          <a:chExt cx="0" cy="0"/>
+        </a:xfrm>
+      </p:grpSpPr>
+      <p:sp>
+        <p:nvSpPr>
+          <p:cNvPr id="2" name="Slide Image Placeholder 1"/>
+          <p:cNvSpPr>
+            <a:spLocks noGrp="1"/>
+          </p:cNvSpPr>
+          <p:nvPr>
+            <p:ph type="sldImg" idx="2"/>
+          </p:nvPr>
+        </p:nvSpPr>
+        <p:spPr/>
+      </p:sp>
+      <p:sp>
+        <p:nvSpPr>
+          <p:cNvPr id="3" name="Notes Placeholder 2"/>
+          <p:cNvSpPr>
+            <a:spLocks noGrp="1"/>
+          </p:cNvSpPr>
+          <p:nvPr>
+            <p:ph type="body" idx="3" sz="quarter"/>
+          </p:nvPr>
+        </p:nvSpPr>
+        <p:spPr/>
+        <p:txBody>
+          <a:bodyPr/>
+          <a:lstStyle/>
+          <a:p>
+            <a:r>
+              <a:rPr sz="1100"/>
+              <a:t>Stres mental adalah salah satu masalah kesehatan modern yang paling pelik. Dipengaruhi banyak faktor — tekanan kerja, pola tidur, aktivitas fisik, kondisi kesehatan, hingga kebiasaan digital seperti screen time sebelum tidur.</a:t>
+            </a:r>
+          </a:p>
+          <a:p>
+            <a:r>
+              <a:rPr sz="1100"/>
+              <a:t>Dengan tersedianya data lifestyle dan health, machine learning bisa memprediksi tingkat stres dari pola tersebut. Tapi masalahnya, kebanyakan model black-box — akurat tapi tidak menjelaskan kenapa.</a:t>
+            </a:r>
+          </a:p>
+          <a:p>
+            <a:r>
+              <a:rPr sz="1100"/>
+              <a:t>Meski SHAP atau LIME bisa memberi explanation, outputnya tetap teknis — nilai SHAP, feature importance — sulit dipahami pengguna awam.</a:t>
+            </a:r>
+          </a:p>
+          <a:p>
+            <a:r>
+              <a:rPr sz="1100"/>
+              <a:t>Yang kami butuhkan adalah sistem yang tidak hanya MEMPREDIKSI, tapi juga MENJELASKAN penyebabnya, MEMBERI SARAN konkret untuk diubah, dan MENATURALISASI semua itu ke bahasa awam yang mudah dipahami.</a:t>
+            </a:r>
+          </a:p>
+        </p:txBody>
+      </p:sp>
+      <p:sp>
+        <p:nvSpPr>
+          <p:cNvPr id="4" name="Slide Number Placeholder 3"/>
+          <p:cNvSpPr>
+            <a:spLocks noGrp="1"/>
+          </p:cNvSpPr>
+          <p:nvPr>
+            <p:ph type="sldNum" idx="5" sz="quarter"/>
+          </p:nvPr>
+        </p:nvSpPr>
+        <p:spPr/>
+      </p:sp>
+    </p:spTree>
+  </p:cSld>
+  <p:clrMapOvr>
+    <a:masterClrMapping/>
+  </p:clrMapOvr>
+</p:notes>
+</file>
+
+<file path=ppt/notesSlides/notesSlide4.xml><?xml version="1.0" encoding="utf-8"?>
+<p:notes xmlns:a="http://schemas.openxmlformats.org/drawingml/2006/main" xmlns:p="http://schemas.openxmlformats.org/presentationml/2006/main" xmlns:r="http://schemas.openxmlformats.org/officeDocument/2006/relationships">
+  <p:cSld>
+    <p:spTree>
+      <p:nvGrpSpPr>
+        <p:cNvPr id="1" name=""/>
+        <p:cNvGrpSpPr/>
+        <p:nvPr/>
+      </p:nvGrpSpPr>
+      <p:grpSpPr>
+        <a:xfrm>
+          <a:off x="0" y="0"/>
+          <a:ext cx="0" cy="0"/>
+          <a:chOff x="0" y="0"/>
+          <a:chExt cx="0" cy="0"/>
+        </a:xfrm>
+      </p:grpSpPr>
+      <p:sp>
+        <p:nvSpPr>
+          <p:cNvPr id="2" name="Slide Image Placeholder 1"/>
+          <p:cNvSpPr>
+            <a:spLocks noGrp="1"/>
+          </p:cNvSpPr>
+          <p:nvPr>
+            <p:ph type="sldImg" idx="2"/>
+          </p:nvPr>
+        </p:nvSpPr>
+        <p:spPr/>
+      </p:sp>
+      <p:sp>
+        <p:nvSpPr>
+          <p:cNvPr id="3" name="Notes Placeholder 2"/>
+          <p:cNvSpPr>
+            <a:spLocks noGrp="1"/>
+          </p:cNvSpPr>
+          <p:nvPr>
+            <p:ph type="body" idx="3" sz="quarter"/>
+          </p:nvPr>
+        </p:nvSpPr>
+        <p:spPr/>
+        <p:txBody>
+          <a:bodyPr/>
+          <a:lstStyle/>
+          <a:p>
+            <a:r>
+              <a:rPr sz="1100"/>
+              <a:t>Di literatur sebelumnya, prediksi stres dan SHAP umumnya sudah ada — tapi belum prescriptive, tidak ada rekomendasi konkret.</a:t>
+            </a:r>
+          </a:p>
+          <a:p>
+            <a:r>
+              <a:rPr sz="1100"/>
+              <a:t>DiCE counterfactual juga sudah populer, tapi kebanyakan untuk klasifikasi seperti loan approval. Penggunaan untuk regression dengan constraint kausal yang strict belum banyak.</a:t>
+            </a:r>
+          </a:p>
+          <a:p>
+            <a:r>
+              <a:rPr sz="1100"/>
+              <a:t>GenAI di healthcare biasanya untuk summarization atau patient education. Belum ada yang menggunakan GPT sebagai NATURALISER output ML khususnya counterfactual.</a:t>
+            </a:r>
+          </a:p>
+          <a:p>
+            <a:r>
+              <a:rPr sz="1100"/>
+              <a:t>Kontribusi kami: pertama, framework 4-tahap terintegrasi. Kedua, design counterfactual yang causally restricted — memisahkan behavior, outcome, dan immutable. Ketiga, layer GenAI dengan safety filter dan faithfulness validation. Keempat, bukti empiris — 62.5 persen CF success rate dengan 100 persen plausibility pada 40 instance.</a:t>
+            </a:r>
+          </a:p>
+        </p:txBody>
+      </p:sp>
+      <p:sp>
+        <p:nvSpPr>
+          <p:cNvPr id="4" name="Slide Number Placeholder 3"/>
+          <p:cNvSpPr>
+            <a:spLocks noGrp="1"/>
+          </p:cNvSpPr>
+          <p:nvPr>
+            <p:ph type="sldNum" idx="5" sz="quarter"/>
+          </p:nvPr>
+        </p:nvSpPr>
+        <p:spPr/>
+      </p:sp>
+    </p:spTree>
+  </p:cSld>
+  <p:clrMapOvr>
+    <a:masterClrMapping/>
+  </p:clrMapOvr>
+</p:notes>
+</file>
+
+<file path=ppt/notesSlides/notesSlide5.xml><?xml version="1.0" encoding="utf-8"?>
+<p:notes xmlns:a="http://schemas.openxmlformats.org/drawingml/2006/main" xmlns:p="http://schemas.openxmlformats.org/presentationml/2006/main" xmlns:r="http://schemas.openxmlformats.org/officeDocument/2006/relationships">
+  <p:cSld>
+    <p:spTree>
+      <p:nvGrpSpPr>
+        <p:cNvPr id="1" name=""/>
+        <p:cNvGrpSpPr/>
+        <p:nvPr/>
+      </p:nvGrpSpPr>
+      <p:grpSpPr>
+        <a:xfrm>
+          <a:off x="0" y="0"/>
+          <a:ext cx="0" cy="0"/>
+          <a:chOff x="0" y="0"/>
+          <a:chExt cx="0" cy="0"/>
+        </a:xfrm>
+      </p:grpSpPr>
+      <p:sp>
+        <p:nvSpPr>
+          <p:cNvPr id="2" name="Slide Image Placeholder 1"/>
+          <p:cNvSpPr>
+            <a:spLocks noGrp="1"/>
+          </p:cNvSpPr>
+          <p:nvPr>
+            <p:ph type="sldImg" idx="2"/>
+          </p:nvPr>
+        </p:nvSpPr>
+        <p:spPr/>
+      </p:sp>
+      <p:sp>
+        <p:nvSpPr>
+          <p:cNvPr id="3" name="Notes Placeholder 2"/>
+          <p:cNvSpPr>
+            <a:spLocks noGrp="1"/>
+          </p:cNvSpPr>
+          <p:nvPr>
+            <p:ph type="body" idx="3" sz="quarter"/>
+          </p:nvPr>
+        </p:nvSpPr>
+        <p:spPr/>
+        <p:txBody>
+          <a:bodyPr/>
+          <a:lstStyle/>
+          <a:p>
+            <a:r>
+              <a:rPr sz="1100"/>
+              <a:t>Ini gambaran umum framework yang kami usulkan, mengalir dari kiri ke kanan.</a:t>
+            </a:r>
+          </a:p>
+          <a:p>
+            <a:r>
+              <a:rPr sz="1100"/>
+              <a:t>Tahap pertama PREDICT: tiga regression model — CatBoost, Random Forest, dan TabNet — memprediksi stress_score di rentang 1.0 sampai 10.0.</a:t>
+            </a:r>
+          </a:p>
+          <a:p>
+            <a:r>
+              <a:rPr sz="1100"/>
+              <a:t>Tahap kedua EXPLAIN: SHAP TreeExplainer memberi penjelasan global maupun lokal — fitur mana yang paling berkontribusi terhadap prediksi.</a:t>
+            </a:r>
+          </a:p>
+          <a:p>
+            <a:r>
+              <a:rPr sz="1100"/>
+              <a:t>Tahap ketiga PRESCRIBE: DiCE generate counterfactual — yaitu perubahan minimal pada fitur yang akan menurunkan prediksi stress. Penting di sini: hanya fitur BEHAVIOR yang boleh diubah. Outcome dan immutable di-lock.</a:t>
+            </a:r>
+          </a:p>
+          <a:p>
+            <a:r>
+              <a:rPr sz="1100"/>
+              <a:t>Tahap keempat NATURALIZE: GPT-4o-mini mengubah angka teknis dari counterfactual menjadi narasi JSON terstruktur dalam Bahasa Indonesia, dengan safety filter dan faithfulness validation.</a:t>
+            </a:r>
+          </a:p>
+          <a:p>
+            <a:r>
+              <a:rPr sz="1100"/>
+              <a:t>Catatan di bawah penting: restriksi causal inilah yang menjamin rekomendasi kami benar-benar actionable, bukan sekadar "ubah outcome Anda" yang tidak ada caranya.</a:t>
+            </a:r>
+          </a:p>
+        </p:txBody>
+      </p:sp>
+      <p:sp>
+        <p:nvSpPr>
+          <p:cNvPr id="4" name="Slide Number Placeholder 3"/>
+          <p:cNvSpPr>
+            <a:spLocks noGrp="1"/>
+          </p:cNvSpPr>
+          <p:nvPr>
+            <p:ph type="sldNum" idx="5" sz="quarter"/>
+          </p:nvPr>
+        </p:nvSpPr>
+        <p:spPr/>
+      </p:sp>
+    </p:spTree>
+  </p:cSld>
+  <p:clrMapOvr>
+    <a:masterClrMapping/>
+  </p:clrMapOvr>
+</p:notes>
+</file>
+
+<file path=ppt/notesSlides/notesSlide6.xml><?xml version="1.0" encoding="utf-8"?>
+<p:notes xmlns:a="http://schemas.openxmlformats.org/drawingml/2006/main" xmlns:p="http://schemas.openxmlformats.org/presentationml/2006/main" xmlns:r="http://schemas.openxmlformats.org/officeDocument/2006/relationships">
+  <p:cSld>
+    <p:spTree>
+      <p:nvGrpSpPr>
+        <p:cNvPr id="1" name=""/>
+        <p:cNvGrpSpPr/>
+        <p:nvPr/>
+      </p:nvGrpSpPr>
+      <p:grpSpPr>
+        <a:xfrm>
+          <a:off x="0" y="0"/>
+          <a:ext cx="0" cy="0"/>
+          <a:chOff x="0" y="0"/>
+          <a:chExt cx="0" cy="0"/>
+        </a:xfrm>
+      </p:grpSpPr>
+      <p:sp>
+        <p:nvSpPr>
+          <p:cNvPr id="2" name="Slide Image Placeholder 1"/>
+          <p:cNvSpPr>
+            <a:spLocks noGrp="1"/>
+          </p:cNvSpPr>
+          <p:nvPr>
+            <p:ph type="sldImg" idx="2"/>
+          </p:nvPr>
+        </p:nvSpPr>
+        <p:spPr/>
+      </p:sp>
+      <p:sp>
+        <p:nvSpPr>
+          <p:cNvPr id="3" name="Notes Placeholder 2"/>
+          <p:cNvSpPr>
+            <a:spLocks noGrp="1"/>
+          </p:cNvSpPr>
+          <p:nvPr>
+            <p:ph type="body" idx="3" sz="quarter"/>
+          </p:nvPr>
+        </p:nvSpPr>
+        <p:spPr/>
+        <p:txBody>
+          <a:bodyPr/>
+          <a:lstStyle/>
+          <a:p>
+            <a:r>
+              <a:rPr sz="1100"/>
+              <a:t>Dataset yang kami pakai adalah Sleep Health &amp; Daily Performance Dataset dari Kaggle. 100 ribu sampel sintetis, 32 fitur, mencakup pola tidur, lifestyle, kesehatan, dan aktivitas harian.</a:t>
+            </a:r>
+          </a:p>
+          <a:p>
+            <a:r>
+              <a:rPr sz="1100"/>
+              <a:t>Untuk iterasi kami pakai stratified sample 10 ribu berdasarkan desil stress_score. Pipeline tetap bisa scale ke 100k penuh.</a:t>
+            </a:r>
+          </a:p>
+          <a:p>
+            <a:r>
+              <a:rPr sz="1100"/>
+              <a:t>EDA mengkonfirmasi: rata-rata stress_score 5.73, standar deviasi 1.62. Korelasi negatif paling kuat adalah sleep_quality_score dengan r = -0.639 — ini sesuai ekspektasi domain.</a:t>
+            </a:r>
+          </a:p>
+          <a:p>
+            <a:r>
+              <a:rPr sz="1100"/>
+              <a:t>Kami drop 4 fitur leakage: person_id, cognitive_performance_score, sleep_disorder_risk, dan felt_rested. Semua co-outcome atau langsung mengindikasikan label.</a:t>
+            </a:r>
+          </a:p>
+          <a:p>
+            <a:r>
+              <a:rPr sz="1100"/>
+              <a:t>Kami siapkan dua versi data: Versi A untuk CatBoost yang native handle kategorikal, dan Versi B dengan ordinal encoding plus StandardScaler untuk Random Forest dan TabNet.</a:t>
+            </a:r>
+          </a:p>
+          <a:p>
+            <a:r>
+              <a:rPr sz="1100"/>
+              <a:t>Split stratified 70/15/15 untuk train/validation/test berdasarkan desil stress_score.</a:t>
+            </a:r>
+          </a:p>
+        </p:txBody>
+      </p:sp>
+      <p:sp>
+        <p:nvSpPr>
+          <p:cNvPr id="4" name="Slide Number Placeholder 3"/>
+          <p:cNvSpPr>
+            <a:spLocks noGrp="1"/>
+          </p:cNvSpPr>
+          <p:nvPr>
+            <p:ph type="sldNum" idx="5" sz="quarter"/>
+          </p:nvPr>
+        </p:nvSpPr>
+        <p:spPr/>
+      </p:sp>
+    </p:spTree>
+  </p:cSld>
+  <p:clrMapOvr>
+    <a:masterClrMapping/>
+  </p:clrMapOvr>
+</p:notes>
+</file>
+
+<file path=ppt/notesSlides/notesSlide7.xml><?xml version="1.0" encoding="utf-8"?>
+<p:notes xmlns:a="http://schemas.openxmlformats.org/drawingml/2006/main" xmlns:p="http://schemas.openxmlformats.org/presentationml/2006/main" xmlns:r="http://schemas.openxmlformats.org/officeDocument/2006/relationships">
+  <p:cSld>
+    <p:spTree>
+      <p:nvGrpSpPr>
+        <p:cNvPr id="1" name=""/>
+        <p:cNvGrpSpPr/>
+        <p:nvPr/>
+      </p:nvGrpSpPr>
+      <p:grpSpPr>
+        <a:xfrm>
+          <a:off x="0" y="0"/>
+          <a:ext cx="0" cy="0"/>
+          <a:chOff x="0" y="0"/>
+          <a:chExt cx="0" cy="0"/>
+        </a:xfrm>
+      </p:grpSpPr>
+      <p:sp>
+        <p:nvSpPr>
+          <p:cNvPr id="2" name="Slide Image Placeholder 1"/>
+          <p:cNvSpPr>
+            <a:spLocks noGrp="1"/>
+          </p:cNvSpPr>
+          <p:nvPr>
+            <p:ph type="sldImg" idx="2"/>
+          </p:nvPr>
+        </p:nvSpPr>
+        <p:spPr/>
+      </p:sp>
+      <p:sp>
+        <p:nvSpPr>
+          <p:cNvPr id="3" name="Notes Placeholder 2"/>
+          <p:cNvSpPr>
+            <a:spLocks noGrp="1"/>
+          </p:cNvSpPr>
+          <p:nvPr>
+            <p:ph type="body" idx="3" sz="quarter"/>
+          </p:nvPr>
+        </p:nvSpPr>
+        <p:spPr/>
+        <p:txBody>
+          <a:bodyPr/>
+          <a:lstStyle/>
+          <a:p>
+            <a:r>
+              <a:rPr sz="1100"/>
+              <a:t>Kami train tiga model regresi.</a:t>
+            </a:r>
+          </a:p>
+          <a:p>
+            <a:r>
+              <a:rPr sz="1100"/>
+              <a:t>CatBoost dengan 1000 iterasi, depth 6, early stopping. Random Forest 300 estimators. TabNet up to 200 epochs.</a:t>
+            </a:r>
+          </a:p>
+          <a:p>
+            <a:r>
+              <a:rPr sz="1100"/>
+              <a:t>Hasilnya: CatBoost menang di semua metric — R² 0.6503, RMSE 0.9523, MAE 0.7584. TabNet kedua dengan R² 0.6422, tipis di belakang. Random Forest ketiga di R² 0.6239.</a:t>
+            </a:r>
+          </a:p>
+          <a:p>
+            <a:r>
+              <a:rPr sz="1100"/>
+              <a:t>Yang menarik: gap antara dua teratas sangat kecil — gradient boosting dan attention-based deep learning sama-sama viable untuk task tabular regression ini.</a:t>
+            </a:r>
+          </a:p>
+          <a:p>
+            <a:r>
+              <a:rPr sz="1100"/>
+              <a:t>5-Fold Cross-Validation pada CatBoost: R² 0.6266 ± 0.0093. Variansi sangat kecil, menunjukkan model sangat stabil — tidak overfit ke fold tertentu.</a:t>
+            </a:r>
+          </a:p>
+          <a:p>
+            <a:r>
+              <a:rPr sz="1100"/>
+              <a:t>Untuk tahap berikutnya — SHAP, CF, GenAI — kami pakai CatBoost karena performa terbaik plus native support untuk fitur kategorikal yang menyederhanakan pipeline.</a:t>
+            </a:r>
+          </a:p>
+        </p:txBody>
+      </p:sp>
+      <p:sp>
+        <p:nvSpPr>
+          <p:cNvPr id="4" name="Slide Number Placeholder 3"/>
+          <p:cNvSpPr>
+            <a:spLocks noGrp="1"/>
+          </p:cNvSpPr>
+          <p:nvPr>
+            <p:ph type="sldNum" idx="5" sz="quarter"/>
+          </p:nvPr>
+        </p:nvSpPr>
+        <p:spPr/>
+      </p:sp>
+    </p:spTree>
+  </p:cSld>
+  <p:clrMapOvr>
+    <a:masterClrMapping/>
+  </p:clrMapOvr>
+</p:notes>
+</file>
+
+<file path=ppt/notesSlides/notesSlide8.xml><?xml version="1.0" encoding="utf-8"?>
+<p:notes xmlns:a="http://schemas.openxmlformats.org/drawingml/2006/main" xmlns:p="http://schemas.openxmlformats.org/presentationml/2006/main" xmlns:r="http://schemas.openxmlformats.org/officeDocument/2006/relationships">
+  <p:cSld>
+    <p:spTree>
+      <p:nvGrpSpPr>
+        <p:cNvPr id="1" name=""/>
+        <p:cNvGrpSpPr/>
+        <p:nvPr/>
+      </p:nvGrpSpPr>
+      <p:grpSpPr>
+        <a:xfrm>
+          <a:off x="0" y="0"/>
+          <a:ext cx="0" cy="0"/>
+          <a:chOff x="0" y="0"/>
+          <a:chExt cx="0" cy="0"/>
+        </a:xfrm>
+      </p:grpSpPr>
+      <p:sp>
+        <p:nvSpPr>
+          <p:cNvPr id="2" name="Slide Image Placeholder 1"/>
+          <p:cNvSpPr>
+            <a:spLocks noGrp="1"/>
+          </p:cNvSpPr>
+          <p:nvPr>
+            <p:ph type="sldImg" idx="2"/>
+          </p:nvPr>
+        </p:nvSpPr>
+        <p:spPr/>
+      </p:sp>
+      <p:sp>
+        <p:nvSpPr>
+          <p:cNvPr id="3" name="Notes Placeholder 2"/>
+          <p:cNvSpPr>
+            <a:spLocks noGrp="1"/>
+          </p:cNvSpPr>
+          <p:nvPr>
+            <p:ph type="body" idx="3" sz="quarter"/>
+          </p:nvPr>
+        </p:nvSpPr>
+        <p:spPr/>
+        <p:txBody>
+          <a:bodyPr/>
+          <a:lstStyle/>
+          <a:p>
+            <a:r>
+              <a:rPr sz="1100"/>
+              <a:t>SHAP TreeExplainer kami aplikasikan pada CatBoost dengan 2000 sample test.</a:t>
+            </a:r>
+          </a:p>
+          <a:p>
+            <a:r>
+              <a:rPr sz="1100"/>
+              <a:t>Top fitur global: sleep_quality_score paling dominan dengan mean SHAP 0.66, lalu occupation 0.57, kemudian sleep_duration_hrs 0.13. Sisanya di bawah 0.10.</a:t>
+            </a:r>
+          </a:p>
+          <a:p>
+            <a:r>
+              <a:rPr sz="1100"/>
+              <a:t>Yang penting adalah DOMAIN VALIDITY sign-check yang kami lakukan. Untuk top fitur numerik, kami hitung korelasi antara nilai fitur dengan SHAP contribution-nya.</a:t>
+            </a:r>
+          </a:p>
+          <a:p>
+            <a:r>
+              <a:rPr sz="1100"/>
+              <a:t>Hasilnya menakjubkan: sleep_quality_score korelasi -0.996. Artinya hampir SEMPURNA — semakin tinggi sleep quality, semakin rendah kontribusi SHAP ke prediksi stress. Persis sesuai ekspektasi domain.</a:t>
+            </a:r>
+          </a:p>
+          <a:p>
+            <a:r>
+              <a:rPr sz="1100"/>
+              <a:t>Wake_episodes -0.981, alcohol -0.977, deep_sleep -0.963. Heart rate positif +0.974 — sesuai bahwa resting HR tinggi adalah indikator stres.</a:t>
+            </a:r>
+          </a:p>
+          <a:p>
+            <a:r>
+              <a:rPr sz="1100"/>
+              <a:t>Sign-check ini meyakinkan bahwa model tidak belajar spurious pattern, tapi pola yang konsisten dengan sleep medicine literature.</a:t>
+            </a:r>
+          </a:p>
+        </p:txBody>
+      </p:sp>
+      <p:sp>
+        <p:nvSpPr>
+          <p:cNvPr id="4" name="Slide Number Placeholder 3"/>
+          <p:cNvSpPr>
+            <a:spLocks noGrp="1"/>
+          </p:cNvSpPr>
+          <p:nvPr>
+            <p:ph type="sldNum" idx="5" sz="quarter"/>
+          </p:nvPr>
+        </p:nvSpPr>
+        <p:spPr/>
+      </p:sp>
+    </p:spTree>
+  </p:cSld>
+  <p:clrMapOvr>
+    <a:masterClrMapping/>
+  </p:clrMapOvr>
+</p:notes>
+</file>
+
+<file path=ppt/notesSlides/notesSlide9.xml><?xml version="1.0" encoding="utf-8"?>
+<p:notes xmlns:a="http://schemas.openxmlformats.org/drawingml/2006/main" xmlns:p="http://schemas.openxmlformats.org/presentationml/2006/main" xmlns:r="http://schemas.openxmlformats.org/officeDocument/2006/relationships">
+  <p:cSld>
+    <p:spTree>
+      <p:nvGrpSpPr>
+        <p:cNvPr id="1" name=""/>
+        <p:cNvGrpSpPr/>
+        <p:nvPr/>
+      </p:nvGrpSpPr>
+      <p:grpSpPr>
+        <a:xfrm>
+          <a:off x="0" y="0"/>
+          <a:ext cx="0" cy="0"/>
+          <a:chOff x="0" y="0"/>
+          <a:chExt cx="0" cy="0"/>
+        </a:xfrm>
+      </p:grpSpPr>
+      <p:sp>
+        <p:nvSpPr>
+          <p:cNvPr id="2" name="Slide Image Placeholder 1"/>
+          <p:cNvSpPr>
+            <a:spLocks noGrp="1"/>
+          </p:cNvSpPr>
+          <p:nvPr>
+            <p:ph type="sldImg" idx="2"/>
+          </p:nvPr>
+        </p:nvSpPr>
+        <p:spPr/>
+      </p:sp>
+      <p:sp>
+        <p:nvSpPr>
+          <p:cNvPr id="3" name="Notes Placeholder 2"/>
+          <p:cNvSpPr>
+            <a:spLocks noGrp="1"/>
+          </p:cNvSpPr>
+          <p:nvPr>
+            <p:ph type="body" idx="3" sz="quarter"/>
+          </p:nvPr>
+        </p:nvSpPr>
+        <p:spPr/>
+        <p:txBody>
+          <a:bodyPr/>
+          <a:lstStyle/>
+          <a:p>
+            <a:r>
+              <a:rPr sz="1100"/>
+              <a:t>DiCE kami konfigurasi dengan genetic algorithm karena lebih robust dari random method untuk regression dengan desired range.</a:t>
+            </a:r>
+          </a:p>
+          <a:p>
+            <a:r>
+              <a:rPr sz="1100"/>
+              <a:t>Fitur kami kelompokkan menjadi tiga kategori yang sangat penting untuk causal validity.</a:t>
+            </a:r>
+          </a:p>
+          <a:p>
+            <a:r>
+              <a:rPr sz="1100"/>
+              <a:t>BEHAVIOR — yang boleh diubah counterfactual — adalah fitur yang bisa dimanipulasi langsung oleh pengguna: durasi tidur, screen time, kafein, alkohol, exercise, langkah, nap, suhu ruangan, dan sleep aid.</a:t>
+            </a:r>
+          </a:p>
+          <a:p>
+            <a:r>
+              <a:rPr sz="1100"/>
+              <a:t>OUTCOME — tidak boleh diubah — adalah fitur fisiologis yang merupakan gejala, bukan kausa: sleep quality score, REM percentage, wake episodes, sleep latency, deep sleep, resting heart rate.</a:t>
+            </a:r>
+          </a:p>
+          <a:p>
+            <a:r>
+              <a:rPr sz="1100"/>
+              <a:t>IMMUTABLE — atribut statis: usia, gender, occupation, BMI, dan sebagainya.</a:t>
+            </a:r>
+          </a:p>
+          <a:p>
+            <a:r>
+              <a:rPr sz="1100"/>
+              <a:t>Permitted range explicit per fitur untuk safety. Yang penting: alcohol_units di-lock di [0,0] supaya DiCE tidak pernah merekomendasikan konsumsi alkohol. Sleep duration dibatasi [4, 10] jam. Caffeine maksimal 400mg, sesuai FDA.</a:t>
+            </a:r>
+          </a:p>
+        </p:txBody>
+      </p:sp>
+      <p:sp>
+        <p:nvSpPr>
+          <p:cNvPr id="4" name="Slide Number Placeholder 3"/>
+          <p:cNvSpPr>
+            <a:spLocks noGrp="1"/>
+          </p:cNvSpPr>
+          <p:nvPr>
+            <p:ph type="sldNum" idx="5" sz="quarter"/>
+          </p:nvPr>
+        </p:nvSpPr>
+        <p:spPr/>
+      </p:sp>
+    </p:spTree>
+  </p:cSld>
+  <p:clrMapOvr>
+    <a:masterClrMapping/>
+  </p:clrMapOvr>
+</p:notes>
 </file>
 
 <file path=ppt/slideLayouts/slideLayout1.xml><?xml version="1.0" encoding="utf-8"?>
@@ -159,10 +2010,9 @@
           <a:lstStyle/>
           <a:p>
             <a:r>
-              <a:rPr lang="en-US" smtClean="0"/>
+              <a:rPr lang="en-US"/>
               <a:t>Click to edit Master title style</a:t>
             </a:r>
-            <a:endParaRPr lang="en-US"/>
           </a:p>
         </p:txBody>
       </p:sp>
@@ -278,10 +2128,9 @@
           </a:lstStyle>
           <a:p>
             <a:r>
-              <a:rPr lang="en-US" smtClean="0"/>
+              <a:rPr lang="en-US"/>
               <a:t>Click to edit Master subtitle style</a:t>
             </a:r>
-            <a:endParaRPr lang="en-US"/>
           </a:p>
         </p:txBody>
       </p:sp>
@@ -302,7 +2151,7 @@
           <a:p>
             <a:fld id="{5BCAD085-E8A6-8845-BD4E-CB4CCA059FC4}" type="datetimeFigureOut">
               <a:rPr lang="en-US" smtClean="0"/>
-              <a:t>1/27/13</a:t>
+              <a:t>5/26/2026</a:t>
             </a:fld>
             <a:endParaRPr lang="en-US"/>
           </a:p>
@@ -396,10 +2245,9 @@
           <a:lstStyle/>
           <a:p>
             <a:r>
-              <a:rPr lang="en-US" smtClean="0"/>
+              <a:rPr lang="en-US"/>
               <a:t>Click to edit Master title style</a:t>
             </a:r>
-            <a:endParaRPr lang="en-US"/>
           </a:p>
         </p:txBody>
       </p:sp>
@@ -420,38 +2268,37 @@
           <a:p>
             <a:pPr lvl="0"/>
             <a:r>
-              <a:rPr lang="en-US" smtClean="0"/>
+              <a:rPr lang="en-US"/>
               <a:t>Click to edit Master text styles</a:t>
             </a:r>
           </a:p>
           <a:p>
             <a:pPr lvl="1"/>
             <a:r>
-              <a:rPr lang="en-US" smtClean="0"/>
+              <a:rPr lang="en-US"/>
               <a:t>Second level</a:t>
             </a:r>
           </a:p>
           <a:p>
             <a:pPr lvl="2"/>
             <a:r>
-              <a:rPr lang="en-US" smtClean="0"/>
+              <a:rPr lang="en-US"/>
               <a:t>Third level</a:t>
             </a:r>
           </a:p>
           <a:p>
             <a:pPr lvl="3"/>
             <a:r>
-              <a:rPr lang="en-US" smtClean="0"/>
+              <a:rPr lang="en-US"/>
               <a:t>Fourth level</a:t>
             </a:r>
           </a:p>
           <a:p>
             <a:pPr lvl="4"/>
             <a:r>
-              <a:rPr lang="en-US" smtClean="0"/>
+              <a:rPr lang="en-US"/>
               <a:t>Fifth level</a:t>
             </a:r>
-            <a:endParaRPr lang="en-US"/>
           </a:p>
         </p:txBody>
       </p:sp>
@@ -472,7 +2319,7 @@
           <a:p>
             <a:fld id="{5BCAD085-E8A6-8845-BD4E-CB4CCA059FC4}" type="datetimeFigureOut">
               <a:rPr lang="en-US" smtClean="0"/>
-              <a:t>1/27/13</a:t>
+              <a:t>5/26/2026</a:t>
             </a:fld>
             <a:endParaRPr lang="en-US"/>
           </a:p>
@@ -571,10 +2418,9 @@
           <a:lstStyle/>
           <a:p>
             <a:r>
-              <a:rPr lang="en-US" smtClean="0"/>
+              <a:rPr lang="en-US"/>
               <a:t>Click to edit Master title style</a:t>
             </a:r>
-            <a:endParaRPr lang="en-US"/>
           </a:p>
         </p:txBody>
       </p:sp>
@@ -600,38 +2446,37 @@
           <a:p>
             <a:pPr lvl="0"/>
             <a:r>
-              <a:rPr lang="en-US" smtClean="0"/>
+              <a:rPr lang="en-US"/>
               <a:t>Click to edit Master text styles</a:t>
             </a:r>
           </a:p>
           <a:p>
             <a:pPr lvl="1"/>
             <a:r>
-              <a:rPr lang="en-US" smtClean="0"/>
+              <a:rPr lang="en-US"/>
               <a:t>Second level</a:t>
             </a:r>
           </a:p>
           <a:p>
             <a:pPr lvl="2"/>
             <a:r>
-              <a:rPr lang="en-US" smtClean="0"/>
+              <a:rPr lang="en-US"/>
               <a:t>Third level</a:t>
             </a:r>
           </a:p>
           <a:p>
             <a:pPr lvl="3"/>
             <a:r>
-              <a:rPr lang="en-US" smtClean="0"/>
+              <a:rPr lang="en-US"/>
               <a:t>Fourth level</a:t>
             </a:r>
           </a:p>
           <a:p>
             <a:pPr lvl="4"/>
             <a:r>
-              <a:rPr lang="en-US" smtClean="0"/>
+              <a:rPr lang="en-US"/>
               <a:t>Fifth level</a:t>
             </a:r>
-            <a:endParaRPr lang="en-US"/>
           </a:p>
         </p:txBody>
       </p:sp>
@@ -652,7 +2497,7 @@
           <a:p>
             <a:fld id="{5BCAD085-E8A6-8845-BD4E-CB4CCA059FC4}" type="datetimeFigureOut">
               <a:rPr lang="en-US" smtClean="0"/>
-              <a:t>1/27/13</a:t>
+              <a:t>5/26/2026</a:t>
             </a:fld>
             <a:endParaRPr lang="en-US"/>
           </a:p>
@@ -746,10 +2591,9 @@
           <a:lstStyle/>
           <a:p>
             <a:r>
-              <a:rPr lang="en-US" smtClean="0"/>
+              <a:rPr lang="en-US"/>
               <a:t>Click to edit Master title style</a:t>
             </a:r>
-            <a:endParaRPr lang="en-US"/>
           </a:p>
         </p:txBody>
       </p:sp>
@@ -770,38 +2614,37 @@
           <a:p>
             <a:pPr lvl="0"/>
             <a:r>
-              <a:rPr lang="en-US" smtClean="0"/>
+              <a:rPr lang="en-US"/>
               <a:t>Click to edit Master text styles</a:t>
             </a:r>
           </a:p>
           <a:p>
             <a:pPr lvl="1"/>
             <a:r>
-              <a:rPr lang="en-US" smtClean="0"/>
+              <a:rPr lang="en-US"/>
               <a:t>Second level</a:t>
             </a:r>
           </a:p>
           <a:p>
             <a:pPr lvl="2"/>
             <a:r>
-              <a:rPr lang="en-US" smtClean="0"/>
+              <a:rPr lang="en-US"/>
               <a:t>Third level</a:t>
             </a:r>
           </a:p>
           <a:p>
             <a:pPr lvl="3"/>
             <a:r>
-              <a:rPr lang="en-US" smtClean="0"/>
+              <a:rPr lang="en-US"/>
               <a:t>Fourth level</a:t>
             </a:r>
           </a:p>
           <a:p>
             <a:pPr lvl="4"/>
             <a:r>
-              <a:rPr lang="en-US" smtClean="0"/>
+              <a:rPr lang="en-US"/>
               <a:t>Fifth level</a:t>
             </a:r>
-            <a:endParaRPr lang="en-US"/>
           </a:p>
         </p:txBody>
       </p:sp>
@@ -822,7 +2665,7 @@
           <a:p>
             <a:fld id="{5BCAD085-E8A6-8845-BD4E-CB4CCA059FC4}" type="datetimeFigureOut">
               <a:rPr lang="en-US" smtClean="0"/>
-              <a:t>1/27/13</a:t>
+              <a:t>5/26/2026</a:t>
             </a:fld>
             <a:endParaRPr lang="en-US"/>
           </a:p>
@@ -925,10 +2768,9 @@
           </a:lstStyle>
           <a:p>
             <a:r>
-              <a:rPr lang="en-US" smtClean="0"/>
+              <a:rPr lang="en-US"/>
               <a:t>Click to edit Master title style</a:t>
             </a:r>
-            <a:endParaRPr lang="en-US"/>
           </a:p>
         </p:txBody>
       </p:sp>
@@ -1045,7 +2887,7 @@
           <a:p>
             <a:pPr lvl="0"/>
             <a:r>
-              <a:rPr lang="en-US" smtClean="0"/>
+              <a:rPr lang="en-US"/>
               <a:t>Click to edit Master text styles</a:t>
             </a:r>
           </a:p>
@@ -1068,7 +2910,7 @@
           <a:p>
             <a:fld id="{5BCAD085-E8A6-8845-BD4E-CB4CCA059FC4}" type="datetimeFigureOut">
               <a:rPr lang="en-US" smtClean="0"/>
-              <a:t>1/27/13</a:t>
+              <a:t>5/26/2026</a:t>
             </a:fld>
             <a:endParaRPr lang="en-US"/>
           </a:p>
@@ -1162,10 +3004,9 @@
           <a:lstStyle/>
           <a:p>
             <a:r>
-              <a:rPr lang="en-US" smtClean="0"/>
+              <a:rPr lang="en-US"/>
               <a:t>Click to edit Master title style</a:t>
             </a:r>
-            <a:endParaRPr lang="en-US"/>
           </a:p>
         </p:txBody>
       </p:sp>
@@ -1219,38 +3060,37 @@
           <a:p>
             <a:pPr lvl="0"/>
             <a:r>
-              <a:rPr lang="en-US" smtClean="0"/>
+              <a:rPr lang="en-US"/>
               <a:t>Click to edit Master text styles</a:t>
             </a:r>
           </a:p>
           <a:p>
             <a:pPr lvl="1"/>
             <a:r>
-              <a:rPr lang="en-US" smtClean="0"/>
+              <a:rPr lang="en-US"/>
               <a:t>Second level</a:t>
             </a:r>
           </a:p>
           <a:p>
             <a:pPr lvl="2"/>
             <a:r>
-              <a:rPr lang="en-US" smtClean="0"/>
+              <a:rPr lang="en-US"/>
               <a:t>Third level</a:t>
             </a:r>
           </a:p>
           <a:p>
             <a:pPr lvl="3"/>
             <a:r>
-              <a:rPr lang="en-US" smtClean="0"/>
+              <a:rPr lang="en-US"/>
               <a:t>Fourth level</a:t>
             </a:r>
           </a:p>
           <a:p>
             <a:pPr lvl="4"/>
             <a:r>
-              <a:rPr lang="en-US" smtClean="0"/>
+              <a:rPr lang="en-US"/>
               <a:t>Fifth level</a:t>
             </a:r>
-            <a:endParaRPr lang="en-US"/>
           </a:p>
         </p:txBody>
       </p:sp>
@@ -1304,38 +3144,37 @@
           <a:p>
             <a:pPr lvl="0"/>
             <a:r>
-              <a:rPr lang="en-US" smtClean="0"/>
+              <a:rPr lang="en-US"/>
               <a:t>Click to edit Master text styles</a:t>
             </a:r>
           </a:p>
           <a:p>
             <a:pPr lvl="1"/>
             <a:r>
-              <a:rPr lang="en-US" smtClean="0"/>
+              <a:rPr lang="en-US"/>
               <a:t>Second level</a:t>
             </a:r>
           </a:p>
           <a:p>
             <a:pPr lvl="2"/>
             <a:r>
-              <a:rPr lang="en-US" smtClean="0"/>
+              <a:rPr lang="en-US"/>
               <a:t>Third level</a:t>
             </a:r>
           </a:p>
           <a:p>
             <a:pPr lvl="3"/>
             <a:r>
-              <a:rPr lang="en-US" smtClean="0"/>
+              <a:rPr lang="en-US"/>
               <a:t>Fourth level</a:t>
             </a:r>
           </a:p>
           <a:p>
             <a:pPr lvl="4"/>
             <a:r>
-              <a:rPr lang="en-US" smtClean="0"/>
+              <a:rPr lang="en-US"/>
               <a:t>Fifth level</a:t>
             </a:r>
-            <a:endParaRPr lang="en-US"/>
           </a:p>
         </p:txBody>
       </p:sp>
@@ -1356,7 +3195,7 @@
           <a:p>
             <a:fld id="{5BCAD085-E8A6-8845-BD4E-CB4CCA059FC4}" type="datetimeFigureOut">
               <a:rPr lang="en-US" smtClean="0"/>
-              <a:t>1/27/13</a:t>
+              <a:t>5/26/2026</a:t>
             </a:fld>
             <a:endParaRPr lang="en-US"/>
           </a:p>
@@ -1454,10 +3293,9 @@
           </a:lstStyle>
           <a:p>
             <a:r>
-              <a:rPr lang="en-US" smtClean="0"/>
+              <a:rPr lang="en-US"/>
               <a:t>Click to edit Master title style</a:t>
             </a:r>
-            <a:endParaRPr lang="en-US"/>
           </a:p>
         </p:txBody>
       </p:sp>
@@ -1520,7 +3358,7 @@
           <a:p>
             <a:pPr lvl="0"/>
             <a:r>
-              <a:rPr lang="en-US" smtClean="0"/>
+              <a:rPr lang="en-US"/>
               <a:t>Click to edit Master text styles</a:t>
             </a:r>
           </a:p>
@@ -1576,38 +3414,37 @@
           <a:p>
             <a:pPr lvl="0"/>
             <a:r>
-              <a:rPr lang="en-US" smtClean="0"/>
+              <a:rPr lang="en-US"/>
               <a:t>Click to edit Master text styles</a:t>
             </a:r>
           </a:p>
           <a:p>
             <a:pPr lvl="1"/>
             <a:r>
-              <a:rPr lang="en-US" smtClean="0"/>
+              <a:rPr lang="en-US"/>
               <a:t>Second level</a:t>
             </a:r>
           </a:p>
           <a:p>
             <a:pPr lvl="2"/>
             <a:r>
-              <a:rPr lang="en-US" smtClean="0"/>
+              <a:rPr lang="en-US"/>
               <a:t>Third level</a:t>
             </a:r>
           </a:p>
           <a:p>
             <a:pPr lvl="3"/>
             <a:r>
-              <a:rPr lang="en-US" smtClean="0"/>
+              <a:rPr lang="en-US"/>
               <a:t>Fourth level</a:t>
             </a:r>
           </a:p>
           <a:p>
             <a:pPr lvl="4"/>
             <a:r>
-              <a:rPr lang="en-US" smtClean="0"/>
+              <a:rPr lang="en-US"/>
               <a:t>Fifth level</a:t>
             </a:r>
-            <a:endParaRPr lang="en-US"/>
           </a:p>
         </p:txBody>
       </p:sp>
@@ -1670,7 +3507,7 @@
           <a:p>
             <a:pPr lvl="0"/>
             <a:r>
-              <a:rPr lang="en-US" smtClean="0"/>
+              <a:rPr lang="en-US"/>
               <a:t>Click to edit Master text styles</a:t>
             </a:r>
           </a:p>
@@ -1726,38 +3563,37 @@
           <a:p>
             <a:pPr lvl="0"/>
             <a:r>
-              <a:rPr lang="en-US" smtClean="0"/>
+              <a:rPr lang="en-US"/>
               <a:t>Click to edit Master text styles</a:t>
             </a:r>
           </a:p>
           <a:p>
             <a:pPr lvl="1"/>
             <a:r>
-              <a:rPr lang="en-US" smtClean="0"/>
+              <a:rPr lang="en-US"/>
               <a:t>Second level</a:t>
             </a:r>
           </a:p>
           <a:p>
             <a:pPr lvl="2"/>
             <a:r>
-              <a:rPr lang="en-US" smtClean="0"/>
+              <a:rPr lang="en-US"/>
               <a:t>Third level</a:t>
             </a:r>
           </a:p>
           <a:p>
             <a:pPr lvl="3"/>
             <a:r>
-              <a:rPr lang="en-US" smtClean="0"/>
+              <a:rPr lang="en-US"/>
               <a:t>Fourth level</a:t>
             </a:r>
           </a:p>
           <a:p>
             <a:pPr lvl="4"/>
             <a:r>
-              <a:rPr lang="en-US" smtClean="0"/>
+              <a:rPr lang="en-US"/>
               <a:t>Fifth level</a:t>
             </a:r>
-            <a:endParaRPr lang="en-US"/>
           </a:p>
         </p:txBody>
       </p:sp>
@@ -1778,7 +3614,7 @@
           <a:p>
             <a:fld id="{5BCAD085-E8A6-8845-BD4E-CB4CCA059FC4}" type="datetimeFigureOut">
               <a:rPr lang="en-US" smtClean="0"/>
-              <a:t>1/27/13</a:t>
+              <a:t>5/26/2026</a:t>
             </a:fld>
             <a:endParaRPr lang="en-US"/>
           </a:p>
@@ -1872,10 +3708,9 @@
           <a:lstStyle/>
           <a:p>
             <a:r>
-              <a:rPr lang="en-US" smtClean="0"/>
+              <a:rPr lang="en-US"/>
               <a:t>Click to edit Master title style</a:t>
             </a:r>
-            <a:endParaRPr lang="en-US"/>
           </a:p>
         </p:txBody>
       </p:sp>
@@ -1896,7 +3731,7 @@
           <a:p>
             <a:fld id="{5BCAD085-E8A6-8845-BD4E-CB4CCA059FC4}" type="datetimeFigureOut">
               <a:rPr lang="en-US" smtClean="0"/>
-              <a:t>1/27/13</a:t>
+              <a:t>5/26/2026</a:t>
             </a:fld>
             <a:endParaRPr lang="en-US"/>
           </a:p>
@@ -1991,7 +3826,7 @@
           <a:p>
             <a:fld id="{5BCAD085-E8A6-8845-BD4E-CB4CCA059FC4}" type="datetimeFigureOut">
               <a:rPr lang="en-US" smtClean="0"/>
-              <a:t>1/27/13</a:t>
+              <a:t>5/26/2026</a:t>
             </a:fld>
             <a:endParaRPr lang="en-US"/>
           </a:p>
@@ -2094,10 +3929,9 @@
           </a:lstStyle>
           <a:p>
             <a:r>
-              <a:rPr lang="en-US" smtClean="0"/>
+              <a:rPr lang="en-US"/>
               <a:t>Click to edit Master title style</a:t>
             </a:r>
-            <a:endParaRPr lang="en-US"/>
           </a:p>
         </p:txBody>
       </p:sp>
@@ -2151,38 +3985,37 @@
           <a:p>
             <a:pPr lvl="0"/>
             <a:r>
-              <a:rPr lang="en-US" smtClean="0"/>
+              <a:rPr lang="en-US"/>
               <a:t>Click to edit Master text styles</a:t>
             </a:r>
           </a:p>
           <a:p>
             <a:pPr lvl="1"/>
             <a:r>
-              <a:rPr lang="en-US" smtClean="0"/>
+              <a:rPr lang="en-US"/>
               <a:t>Second level</a:t>
             </a:r>
           </a:p>
           <a:p>
             <a:pPr lvl="2"/>
             <a:r>
-              <a:rPr lang="en-US" smtClean="0"/>
+              <a:rPr lang="en-US"/>
               <a:t>Third level</a:t>
             </a:r>
           </a:p>
           <a:p>
             <a:pPr lvl="3"/>
             <a:r>
-              <a:rPr lang="en-US" smtClean="0"/>
+              <a:rPr lang="en-US"/>
               <a:t>Fourth level</a:t>
             </a:r>
           </a:p>
           <a:p>
             <a:pPr lvl="4"/>
             <a:r>
-              <a:rPr lang="en-US" smtClean="0"/>
+              <a:rPr lang="en-US"/>
               <a:t>Fifth level</a:t>
             </a:r>
-            <a:endParaRPr lang="en-US"/>
           </a:p>
         </p:txBody>
       </p:sp>
@@ -2245,7 +4078,7 @@
           <a:p>
             <a:pPr lvl="0"/>
             <a:r>
-              <a:rPr lang="en-US" smtClean="0"/>
+              <a:rPr lang="en-US"/>
               <a:t>Click to edit Master text styles</a:t>
             </a:r>
           </a:p>
@@ -2268,7 +4101,7 @@
           <a:p>
             <a:fld id="{5BCAD085-E8A6-8845-BD4E-CB4CCA059FC4}" type="datetimeFigureOut">
               <a:rPr lang="en-US" smtClean="0"/>
-              <a:t>1/27/13</a:t>
+              <a:t>5/26/2026</a:t>
             </a:fld>
             <a:endParaRPr lang="en-US"/>
           </a:p>
@@ -2371,10 +4204,9 @@
           </a:lstStyle>
           <a:p>
             <a:r>
-              <a:rPr lang="en-US" smtClean="0"/>
+              <a:rPr lang="en-US"/>
               <a:t>Click to edit Master title style</a:t>
             </a:r>
-            <a:endParaRPr lang="en-US"/>
           </a:p>
         </p:txBody>
       </p:sp>
@@ -2498,7 +4330,7 @@
           <a:p>
             <a:pPr lvl="0"/>
             <a:r>
-              <a:rPr lang="en-US" smtClean="0"/>
+              <a:rPr lang="en-US"/>
               <a:t>Click to edit Master text styles</a:t>
             </a:r>
           </a:p>
@@ -2521,7 +4353,7 @@
           <a:p>
             <a:fld id="{5BCAD085-E8A6-8845-BD4E-CB4CCA059FC4}" type="datetimeFigureOut">
               <a:rPr lang="en-US" smtClean="0"/>
-              <a:t>1/27/13</a:t>
+              <a:t>5/26/2026</a:t>
             </a:fld>
             <a:endParaRPr lang="en-US"/>
           </a:p>
@@ -2630,10 +4462,9 @@
           <a:lstStyle/>
           <a:p>
             <a:r>
-              <a:rPr lang="en-US" smtClean="0"/>
+              <a:rPr lang="en-US"/>
               <a:t>Click to edit Master title style</a:t>
             </a:r>
-            <a:endParaRPr lang="en-US"/>
           </a:p>
         </p:txBody>
       </p:sp>
@@ -2664,38 +4495,37 @@
           <a:p>
             <a:pPr lvl="0"/>
             <a:r>
-              <a:rPr lang="en-US" smtClean="0"/>
+              <a:rPr lang="en-US"/>
               <a:t>Click to edit Master text styles</a:t>
             </a:r>
           </a:p>
           <a:p>
             <a:pPr lvl="1"/>
             <a:r>
-              <a:rPr lang="en-US" smtClean="0"/>
+              <a:rPr lang="en-US"/>
               <a:t>Second level</a:t>
             </a:r>
           </a:p>
           <a:p>
             <a:pPr lvl="2"/>
             <a:r>
-              <a:rPr lang="en-US" smtClean="0"/>
+              <a:rPr lang="en-US"/>
               <a:t>Third level</a:t>
             </a:r>
           </a:p>
           <a:p>
             <a:pPr lvl="3"/>
             <a:r>
-              <a:rPr lang="en-US" smtClean="0"/>
+              <a:rPr lang="en-US"/>
               <a:t>Fourth level</a:t>
             </a:r>
           </a:p>
           <a:p>
             <a:pPr lvl="4"/>
             <a:r>
-              <a:rPr lang="en-US" smtClean="0"/>
+              <a:rPr lang="en-US"/>
               <a:t>Fifth level</a:t>
             </a:r>
-            <a:endParaRPr lang="en-US"/>
           </a:p>
         </p:txBody>
       </p:sp>
@@ -2734,7 +4564,7 @@
           <a:p>
             <a:fld id="{5BCAD085-E8A6-8845-BD4E-CB4CCA059FC4}" type="datetimeFigureOut">
               <a:rPr lang="en-US" smtClean="0"/>
-              <a:t>1/27/13</a:t>
+              <a:t>5/26/2026</a:t>
             </a:fld>
             <a:endParaRPr lang="en-US"/>
           </a:p>
@@ -3093,7 +4923,7 @@
 </file>
 
 <file path=ppt/slides/slide1.xml><?xml version="1.0" encoding="utf-8"?>
-<p:sld xmlns:a="http://schemas.openxmlformats.org/drawingml/2006/main" xmlns:p="http://schemas.openxmlformats.org/presentationml/2006/main" xmlns:r="http://schemas.openxmlformats.org/officeDocument/2006/relationships">
+<p:sld xmlns:a="http://schemas.openxmlformats.org/drawingml/2006/main" xmlns:r="http://schemas.openxmlformats.org/officeDocument/2006/relationships" xmlns:p="http://schemas.openxmlformats.org/presentationml/2006/main">
   <p:cSld>
     <p:spTree>
       <p:nvGrpSpPr>
@@ -3101,7 +4931,14 @@
         <p:cNvGrpSpPr/>
         <p:nvPr/>
       </p:nvGrpSpPr>
-      <p:grpSpPr/>
+      <p:grpSpPr>
+        <a:xfrm>
+          <a:off x="0" y="0"/>
+          <a:ext cx="0" cy="0"/>
+          <a:chOff x="0" y="0"/>
+          <a:chExt cx="0" cy="0"/>
+        </a:xfrm>
+      </p:grpSpPr>
       <p:sp>
         <p:nvSpPr>
           <p:cNvPr id="2" name="Rectangle 1"/>
@@ -3142,6 +4979,7 @@
           <a:lstStyle/>
           <a:p>
             <a:pPr algn="ctr"/>
+            <a:endParaRPr/>
           </a:p>
         </p:txBody>
       </p:sp>
@@ -3191,7 +5029,7 @@
         <p:spPr>
           <a:xfrm>
             <a:off x="731520" y="3931920"/>
-            <a:ext cx="10728655" cy="1371600"/>
+            <a:ext cx="10728655" cy="1815882"/>
           </a:xfrm>
           <a:prstGeom prst="rect">
             <a:avLst/>
@@ -3206,14 +5044,107 @@
           <a:p>
             <a:pPr algn="ctr"/>
             <a:r>
-              <a:rPr sz="2000">
-                <a:solidFill>
-                  <a:srgbClr val="404040"/>
-                </a:solidFill>
-              </a:rPr>
-              <a:t>Ananta Dwi Prayoga Alwy, Dhayu Intan Nareswari,
-Mahathir Muhammad, Obi Kastanya</a:t>
-            </a:r>
+              <a:rPr sz="2000" dirty="0">
+                <a:solidFill>
+                  <a:srgbClr val="404040"/>
+                </a:solidFill>
+              </a:rPr>
+              <a:t>Ananta Dwi </a:t>
+            </a:r>
+            <a:r>
+              <a:rPr sz="2000" dirty="0" err="1">
+                <a:solidFill>
+                  <a:srgbClr val="404040"/>
+                </a:solidFill>
+              </a:rPr>
+              <a:t>Prayoga</a:t>
+            </a:r>
+            <a:r>
+              <a:rPr sz="2000" dirty="0">
+                <a:solidFill>
+                  <a:srgbClr val="404040"/>
+                </a:solidFill>
+              </a:rPr>
+              <a:t> </a:t>
+            </a:r>
+            <a:r>
+              <a:rPr sz="2000" dirty="0" err="1">
+                <a:solidFill>
+                  <a:srgbClr val="404040"/>
+                </a:solidFill>
+              </a:rPr>
+              <a:t>Alwy</a:t>
+            </a:r>
+            <a:r>
+              <a:rPr sz="2000" dirty="0">
+                <a:solidFill>
+                  <a:srgbClr val="404040"/>
+                </a:solidFill>
+              </a:rPr>
+              <a:t>, </a:t>
+            </a:r>
+            <a:r>
+              <a:rPr sz="2000" dirty="0" err="1">
+                <a:solidFill>
+                  <a:srgbClr val="404040"/>
+                </a:solidFill>
+              </a:rPr>
+              <a:t>Dhayu</a:t>
+            </a:r>
+            <a:r>
+              <a:rPr sz="2000" dirty="0">
+                <a:solidFill>
+                  <a:srgbClr val="404040"/>
+                </a:solidFill>
+              </a:rPr>
+              <a:t> Intan </a:t>
+            </a:r>
+            <a:r>
+              <a:rPr sz="2000" dirty="0" err="1">
+                <a:solidFill>
+                  <a:srgbClr val="404040"/>
+                </a:solidFill>
+              </a:rPr>
+              <a:t>Nareswari</a:t>
+            </a:r>
+            <a:r>
+              <a:rPr sz="2000" dirty="0">
+                <a:solidFill>
+                  <a:srgbClr val="404040"/>
+                </a:solidFill>
+              </a:rPr>
+              <a:t>,
+Obi </a:t>
+            </a:r>
+            <a:r>
+              <a:rPr sz="2000" dirty="0" err="1">
+                <a:solidFill>
+                  <a:srgbClr val="404040"/>
+                </a:solidFill>
+              </a:rPr>
+              <a:t>Kastanya</a:t>
+            </a:r>
+            <a:r>
+              <a:rPr lang="en-US" sz="2000" dirty="0">
+                <a:solidFill>
+                  <a:srgbClr val="404040"/>
+                </a:solidFill>
+              </a:rPr>
+              <a:t>,</a:t>
+            </a:r>
+            <a:r>
+              <a:rPr lang="en-ID" sz="2000" dirty="0">
+                <a:solidFill>
+                  <a:srgbClr val="404040"/>
+                </a:solidFill>
+              </a:rPr>
+              <a:t> Mahathir Muhammad</a:t>
+            </a:r>
+            <a:endParaRPr sz="2000" dirty="0">
+              <a:solidFill>
+                <a:srgbClr val="404040"/>
+              </a:solidFill>
+            </a:endParaRPr>
           </a:p>
           <a:p>
             <a:pPr algn="ctr">
@@ -3222,14 +5153,78 @@
               </a:spcBef>
             </a:pPr>
             <a:r>
-              <a:rPr sz="1400" i="1">
+              <a:rPr sz="1400" i="1" dirty="0">
                 <a:solidFill>
                   <a:srgbClr val="404040"/>
                 </a:solidFill>
               </a:rPr>
               <a:t>Department of Informatics
 Faculty of Intelligent Electrical and Informatics Technology
-Institut Teknologi Sepuluh Nopember, Surabaya, Indonesia</a:t>
+</a:t>
+            </a:r>
+            <a:r>
+              <a:rPr sz="1400" i="1" dirty="0" err="1">
+                <a:solidFill>
+                  <a:srgbClr val="404040"/>
+                </a:solidFill>
+              </a:rPr>
+              <a:t>Institut</a:t>
+            </a:r>
+            <a:r>
+              <a:rPr sz="1400" i="1" dirty="0">
+                <a:solidFill>
+                  <a:srgbClr val="404040"/>
+                </a:solidFill>
+              </a:rPr>
+              <a:t> </a:t>
+            </a:r>
+            <a:r>
+              <a:rPr sz="1400" i="1" dirty="0" err="1">
+                <a:solidFill>
+                  <a:srgbClr val="404040"/>
+                </a:solidFill>
+              </a:rPr>
+              <a:t>Teknologi</a:t>
+            </a:r>
+            <a:r>
+              <a:rPr sz="1400" i="1" dirty="0">
+                <a:solidFill>
+                  <a:srgbClr val="404040"/>
+                </a:solidFill>
+              </a:rPr>
+              <a:t> </a:t>
+            </a:r>
+            <a:r>
+              <a:rPr sz="1400" i="1" dirty="0" err="1">
+                <a:solidFill>
+                  <a:srgbClr val="404040"/>
+                </a:solidFill>
+              </a:rPr>
+              <a:t>Sepuluh</a:t>
+            </a:r>
+            <a:r>
+              <a:rPr sz="1400" i="1" dirty="0">
+                <a:solidFill>
+                  <a:srgbClr val="404040"/>
+                </a:solidFill>
+              </a:rPr>
+              <a:t> </a:t>
+            </a:r>
+            <a:r>
+              <a:rPr sz="1400" i="1" dirty="0" err="1">
+                <a:solidFill>
+                  <a:srgbClr val="404040"/>
+                </a:solidFill>
+              </a:rPr>
+              <a:t>Nopember</a:t>
+            </a:r>
+            <a:r>
+              <a:rPr sz="1400" i="1" dirty="0">
+                <a:solidFill>
+                  <a:srgbClr val="404040"/>
+                </a:solidFill>
+              </a:rPr>
+              <a:t>, Surabaya, Indonesia</a:t>
             </a:r>
           </a:p>
         </p:txBody>
@@ -3310,7 +5305,7 @@
 </file>
 
 <file path=ppt/slides/slide10.xml><?xml version="1.0" encoding="utf-8"?>
-<p:sld xmlns:a="http://schemas.openxmlformats.org/drawingml/2006/main" xmlns:p="http://schemas.openxmlformats.org/presentationml/2006/main" xmlns:r="http://schemas.openxmlformats.org/officeDocument/2006/relationships">
+<p:sld xmlns:a="http://schemas.openxmlformats.org/drawingml/2006/main" xmlns:r="http://schemas.openxmlformats.org/officeDocument/2006/relationships" xmlns:p="http://schemas.openxmlformats.org/presentationml/2006/main">
   <p:cSld>
     <p:spTree>
       <p:nvGrpSpPr>
@@ -3318,7 +5313,14 @@
         <p:cNvGrpSpPr/>
         <p:nvPr/>
       </p:nvGrpSpPr>
-      <p:grpSpPr/>
+      <p:grpSpPr>
+        <a:xfrm>
+          <a:off x="0" y="0"/>
+          <a:ext cx="0" cy="0"/>
+          <a:chOff x="0" y="0"/>
+          <a:chExt cx="0" cy="0"/>
+        </a:xfrm>
+      </p:grpSpPr>
       <p:sp>
         <p:nvSpPr>
           <p:cNvPr id="2" name="TextBox 1"/>
@@ -3419,7 +5421,7 @@
               </a:spcAft>
             </a:pPr>
             <a:r>
-              <a:rPr sz="1500">
+              <a:rPr sz="1500" dirty="0">
                 <a:solidFill>
                   <a:srgbClr val="404040"/>
                 </a:solidFill>
@@ -3438,7 +5440,7 @@
               </a:spcAft>
             </a:pPr>
             <a:r>
-              <a:rPr sz="1500">
+              <a:rPr sz="1500" dirty="0">
                 <a:solidFill>
                   <a:srgbClr val="404040"/>
                 </a:solidFill>
@@ -3457,7 +5459,7 @@
               </a:spcAft>
             </a:pPr>
             <a:r>
-              <a:rPr sz="1300">
+              <a:rPr sz="1300" dirty="0">
                 <a:solidFill>
                   <a:srgbClr val="404040"/>
                 </a:solidFill>
@@ -3476,7 +5478,7 @@
               </a:spcAft>
             </a:pPr>
             <a:r>
-              <a:rPr sz="1300">
+              <a:rPr sz="1300" dirty="0">
                 <a:solidFill>
                   <a:srgbClr val="404040"/>
                 </a:solidFill>
@@ -3494,15 +5496,12 @@
                 <a:spcPts val="600"/>
               </a:spcAft>
             </a:pPr>
-            <a:r>
-              <a:rPr sz="1500">
-                <a:solidFill>
-                  <a:srgbClr val="404040"/>
-                </a:solidFill>
-                <a:latin typeface="Calibri"/>
-              </a:rPr>
-              <a:t>• </a:t>
-            </a:r>
+            <a:endParaRPr sz="1500" dirty="0">
+              <a:solidFill>
+                <a:srgbClr val="404040"/>
+              </a:solidFill>
+              <a:latin typeface="Calibri"/>
+            </a:endParaRPr>
           </a:p>
           <a:p>
             <a:pPr>
@@ -3514,13 +5513,49 @@
               </a:spcAft>
             </a:pPr>
             <a:r>
-              <a:rPr sz="1500">
-                <a:solidFill>
-                  <a:srgbClr val="404040"/>
-                </a:solidFill>
-                <a:latin typeface="Calibri"/>
-              </a:rPr>
-              <a:t>• API config: temperature=0.3, response_format='json_object',</a:t>
+              <a:rPr sz="1500" dirty="0">
+                <a:solidFill>
+                  <a:srgbClr val="404040"/>
+                </a:solidFill>
+                <a:latin typeface="Calibri"/>
+              </a:rPr>
+              <a:t>• API config: temperature=0.3, </a:t>
+            </a:r>
+            <a:r>
+              <a:rPr sz="1500" dirty="0" err="1">
+                <a:solidFill>
+                  <a:srgbClr val="404040"/>
+                </a:solidFill>
+                <a:latin typeface="Calibri"/>
+              </a:rPr>
+              <a:t>response_format</a:t>
+            </a:r>
+            <a:r>
+              <a:rPr sz="1500" dirty="0">
+                <a:solidFill>
+                  <a:srgbClr val="404040"/>
+                </a:solidFill>
+                <a:latin typeface="Calibri"/>
+              </a:rPr>
+              <a:t>='</a:t>
+            </a:r>
+            <a:r>
+              <a:rPr sz="1500" dirty="0" err="1">
+                <a:solidFill>
+                  <a:srgbClr val="404040"/>
+                </a:solidFill>
+                <a:latin typeface="Calibri"/>
+              </a:rPr>
+              <a:t>json_object</a:t>
+            </a:r>
+            <a:r>
+              <a:rPr sz="1500" dirty="0">
+                <a:solidFill>
+                  <a:srgbClr val="404040"/>
+                </a:solidFill>
+                <a:latin typeface="Calibri"/>
+              </a:rPr>
+              <a:t>',</a:t>
             </a:r>
           </a:p>
           <a:p>
@@ -3533,13 +5568,31 @@
               </a:spcAft>
             </a:pPr>
             <a:r>
-              <a:rPr sz="1300">
-                <a:solidFill>
-                  <a:srgbClr val="404040"/>
-                </a:solidFill>
-                <a:latin typeface="Calibri"/>
-              </a:rPr>
-              <a:t>– max_tokens=700, system prompt = sleep counselor role</a:t>
+              <a:rPr sz="1300" dirty="0">
+                <a:solidFill>
+                  <a:srgbClr val="404040"/>
+                </a:solidFill>
+                <a:latin typeface="Calibri"/>
+              </a:rPr>
+              <a:t>– </a:t>
+            </a:r>
+            <a:r>
+              <a:rPr sz="1300" dirty="0" err="1">
+                <a:solidFill>
+                  <a:srgbClr val="404040"/>
+                </a:solidFill>
+                <a:latin typeface="Calibri"/>
+              </a:rPr>
+              <a:t>max_tokens</a:t>
+            </a:r>
+            <a:r>
+              <a:rPr sz="1300" dirty="0">
+                <a:solidFill>
+                  <a:srgbClr val="404040"/>
+                </a:solidFill>
+                <a:latin typeface="Calibri"/>
+              </a:rPr>
+              <a:t>=700, system prompt = sleep counselor role</a:t>
             </a:r>
           </a:p>
           <a:p>
@@ -3551,15 +5604,12 @@
                 <a:spcPts val="600"/>
               </a:spcAft>
             </a:pPr>
-            <a:r>
-              <a:rPr sz="1500">
-                <a:solidFill>
-                  <a:srgbClr val="404040"/>
-                </a:solidFill>
-                <a:latin typeface="Calibri"/>
-              </a:rPr>
-              <a:t>• </a:t>
-            </a:r>
+            <a:endParaRPr sz="1500" dirty="0">
+              <a:solidFill>
+                <a:srgbClr val="404040"/>
+              </a:solidFill>
+              <a:latin typeface="Calibri"/>
+            </a:endParaRPr>
           </a:p>
           <a:p>
             <a:pPr>
@@ -3571,7 +5621,7 @@
               </a:spcAft>
             </a:pPr>
             <a:r>
-              <a:rPr sz="1500">
+              <a:rPr sz="1500" dirty="0">
                 <a:solidFill>
                   <a:srgbClr val="404040"/>
                 </a:solidFill>
@@ -3590,13 +5640,67 @@
               </a:spcAft>
             </a:pPr>
             <a:r>
-              <a:rPr sz="1300">
-                <a:solidFill>
-                  <a:srgbClr val="404040"/>
-                </a:solidFill>
-                <a:latin typeface="Calibri"/>
-              </a:rPr>
-              <a:t>– (a) Regex safety filter — block 'obat', 'diagnosa', 'menjamin',</a:t>
+              <a:rPr sz="1300" dirty="0">
+                <a:solidFill>
+                  <a:srgbClr val="404040"/>
+                </a:solidFill>
+                <a:latin typeface="Calibri"/>
+              </a:rPr>
+              <a:t>– (a) Regex safety filter — block '</a:t>
+            </a:r>
+            <a:r>
+              <a:rPr sz="1300" dirty="0" err="1">
+                <a:solidFill>
+                  <a:srgbClr val="404040"/>
+                </a:solidFill>
+                <a:latin typeface="Calibri"/>
+              </a:rPr>
+              <a:t>obat</a:t>
+            </a:r>
+            <a:r>
+              <a:rPr sz="1300" dirty="0">
+                <a:solidFill>
+                  <a:srgbClr val="404040"/>
+                </a:solidFill>
+                <a:latin typeface="Calibri"/>
+              </a:rPr>
+              <a:t>', '</a:t>
+            </a:r>
+            <a:r>
+              <a:rPr sz="1300" dirty="0" err="1">
+                <a:solidFill>
+                  <a:srgbClr val="404040"/>
+                </a:solidFill>
+                <a:latin typeface="Calibri"/>
+              </a:rPr>
+              <a:t>diagnosa</a:t>
+            </a:r>
+            <a:r>
+              <a:rPr sz="1300" dirty="0">
+                <a:solidFill>
+                  <a:srgbClr val="404040"/>
+                </a:solidFill>
+                <a:latin typeface="Calibri"/>
+              </a:rPr>
+              <a:t>', '</a:t>
+            </a:r>
+            <a:r>
+              <a:rPr sz="1300" dirty="0" err="1">
+                <a:solidFill>
+                  <a:srgbClr val="404040"/>
+                </a:solidFill>
+                <a:latin typeface="Calibri"/>
+              </a:rPr>
+              <a:t>menjamin</a:t>
+            </a:r>
+            <a:r>
+              <a:rPr sz="1300" dirty="0">
+                <a:solidFill>
+                  <a:srgbClr val="404040"/>
+                </a:solidFill>
+                <a:latin typeface="Calibri"/>
+              </a:rPr>
+              <a:t>',</a:t>
             </a:r>
           </a:p>
           <a:p>
@@ -3609,13 +5713,67 @@
               </a:spcAft>
             </a:pPr>
             <a:r>
-              <a:rPr sz="1100">
-                <a:solidFill>
-                  <a:srgbClr val="404040"/>
-                </a:solidFill>
-                <a:latin typeface="Calibri"/>
-              </a:rPr>
-              <a:t>– 'mulai minum alkohol', etc.</a:t>
+              <a:rPr sz="1100" dirty="0">
+                <a:solidFill>
+                  <a:srgbClr val="404040"/>
+                </a:solidFill>
+                <a:latin typeface="Calibri"/>
+              </a:rPr>
+              <a:t>– '</a:t>
+            </a:r>
+            <a:r>
+              <a:rPr sz="1100" dirty="0" err="1">
+                <a:solidFill>
+                  <a:srgbClr val="404040"/>
+                </a:solidFill>
+                <a:latin typeface="Calibri"/>
+              </a:rPr>
+              <a:t>mulai</a:t>
+            </a:r>
+            <a:r>
+              <a:rPr sz="1100" dirty="0">
+                <a:solidFill>
+                  <a:srgbClr val="404040"/>
+                </a:solidFill>
+                <a:latin typeface="Calibri"/>
+              </a:rPr>
+              <a:t> </a:t>
+            </a:r>
+            <a:r>
+              <a:rPr sz="1100" dirty="0" err="1">
+                <a:solidFill>
+                  <a:srgbClr val="404040"/>
+                </a:solidFill>
+                <a:latin typeface="Calibri"/>
+              </a:rPr>
+              <a:t>minum</a:t>
+            </a:r>
+            <a:r>
+              <a:rPr sz="1100" dirty="0">
+                <a:solidFill>
+                  <a:srgbClr val="404040"/>
+                </a:solidFill>
+                <a:latin typeface="Calibri"/>
+              </a:rPr>
+              <a:t> </a:t>
+            </a:r>
+            <a:r>
+              <a:rPr sz="1100" dirty="0" err="1">
+                <a:solidFill>
+                  <a:srgbClr val="404040"/>
+                </a:solidFill>
+                <a:latin typeface="Calibri"/>
+              </a:rPr>
+              <a:t>alkohol</a:t>
+            </a:r>
+            <a:r>
+              <a:rPr sz="1100" dirty="0">
+                <a:solidFill>
+                  <a:srgbClr val="404040"/>
+                </a:solidFill>
+                <a:latin typeface="Calibri"/>
+              </a:rPr>
+              <a:t>', etc.</a:t>
             </a:r>
           </a:p>
           <a:p>
@@ -3628,7 +5786,7 @@
               </a:spcAft>
             </a:pPr>
             <a:r>
-              <a:rPr sz="1300">
+              <a:rPr sz="1300" dirty="0">
                 <a:solidFill>
                   <a:srgbClr val="404040"/>
                 </a:solidFill>
@@ -3647,7 +5805,7 @@
               </a:spcAft>
             </a:pPr>
             <a:r>
-              <a:rPr sz="1100">
+              <a:rPr sz="1100" dirty="0">
                 <a:solidFill>
                   <a:srgbClr val="404040"/>
                 </a:solidFill>
@@ -3666,7 +5824,7 @@
               </a:spcAft>
             </a:pPr>
             <a:r>
-              <a:rPr sz="1300">
+              <a:rPr sz="1300" dirty="0">
                 <a:solidFill>
                   <a:srgbClr val="404040"/>
                 </a:solidFill>
@@ -3753,7 +5911,7 @@
 </file>
 
 <file path=ppt/slides/slide11.xml><?xml version="1.0" encoding="utf-8"?>
-<p:sld xmlns:a="http://schemas.openxmlformats.org/drawingml/2006/main" xmlns:p="http://schemas.openxmlformats.org/presentationml/2006/main" xmlns:r="http://schemas.openxmlformats.org/officeDocument/2006/relationships">
+<p:sld xmlns:a="http://schemas.openxmlformats.org/drawingml/2006/main" xmlns:r="http://schemas.openxmlformats.org/officeDocument/2006/relationships" xmlns:p="http://schemas.openxmlformats.org/presentationml/2006/main">
   <p:cSld>
     <p:spTree>
       <p:nvGrpSpPr>
@@ -3761,7 +5919,14 @@
         <p:cNvGrpSpPr/>
         <p:nvPr/>
       </p:nvGrpSpPr>
-      <p:grpSpPr/>
+      <p:grpSpPr>
+        <a:xfrm>
+          <a:off x="0" y="0"/>
+          <a:ext cx="0" cy="0"/>
+          <a:chOff x="0" y="0"/>
+          <a:chExt cx="0" cy="0"/>
+        </a:xfrm>
+      </p:grpSpPr>
       <p:sp>
         <p:nvSpPr>
           <p:cNvPr id="2" name="TextBox 1"/>
@@ -3816,9 +5981,27 @@
                 <a:tableStyleId>{5C22544A-7EE6-4342-B048-85BDC9FD1C3A}</a:tableStyleId>
               </a:tblPr>
               <a:tblGrid>
-                <a:gridCol w="2926080"/>
-                <a:gridCol w="1554480"/>
-                <a:gridCol w="1371600"/>
+                <a:gridCol w="2926080">
+                  <a:extLst>
+                    <a:ext uri="{9D8B030D-6E8A-4147-A177-3AD203B41FA5}">
+                      <a16:colId xmlns:a16="http://schemas.microsoft.com/office/drawing/2014/main" val="20000"/>
+                    </a:ext>
+                  </a:extLst>
+                </a:gridCol>
+                <a:gridCol w="1554480">
+                  <a:extLst>
+                    <a:ext uri="{9D8B030D-6E8A-4147-A177-3AD203B41FA5}">
+                      <a16:colId xmlns:a16="http://schemas.microsoft.com/office/drawing/2014/main" val="20001"/>
+                    </a:ext>
+                  </a:extLst>
+                </a:gridCol>
+                <a:gridCol w="1371600">
+                  <a:extLst>
+                    <a:ext uri="{9D8B030D-6E8A-4147-A177-3AD203B41FA5}">
+                      <a16:colId xmlns:a16="http://schemas.microsoft.com/office/drawing/2014/main" val="20002"/>
+                    </a:ext>
+                  </a:extLst>
+                </a:gridCol>
               </a:tblGrid>
               <a:tr h="365760">
                 <a:tc>
@@ -3890,6 +6073,11 @@
                     </a:solidFill>
                   </a:tcPr>
                 </a:tc>
+                <a:extLst>
+                  <a:ext uri="{0D108BD9-81ED-4DB2-BD59-A6C34878D82A}">
+                    <a16:rowId xmlns:a16="http://schemas.microsoft.com/office/drawing/2014/main" val="10000"/>
+                  </a:ext>
+                </a:extLst>
               </a:tr>
               <a:tr h="365760">
                 <a:tc>
@@ -3940,6 +6128,11 @@
                   </a:txBody>
                   <a:tcPr/>
                 </a:tc>
+                <a:extLst>
+                  <a:ext uri="{0D108BD9-81ED-4DB2-BD59-A6C34878D82A}">
+                    <a16:rowId xmlns:a16="http://schemas.microsoft.com/office/drawing/2014/main" val="10001"/>
+                  </a:ext>
+                </a:extLst>
               </a:tr>
               <a:tr h="365760">
                 <a:tc>
@@ -3990,6 +6183,11 @@
                   </a:txBody>
                   <a:tcPr/>
                 </a:tc>
+                <a:extLst>
+                  <a:ext uri="{0D108BD9-81ED-4DB2-BD59-A6C34878D82A}">
+                    <a16:rowId xmlns:a16="http://schemas.microsoft.com/office/drawing/2014/main" val="10002"/>
+                  </a:ext>
+                </a:extLst>
               </a:tr>
               <a:tr h="365760">
                 <a:tc>
@@ -4040,6 +6238,11 @@
                   </a:txBody>
                   <a:tcPr/>
                 </a:tc>
+                <a:extLst>
+                  <a:ext uri="{0D108BD9-81ED-4DB2-BD59-A6C34878D82A}">
+                    <a16:rowId xmlns:a16="http://schemas.microsoft.com/office/drawing/2014/main" val="10003"/>
+                  </a:ext>
+                </a:extLst>
               </a:tr>
               <a:tr h="365760">
                 <a:tc>
@@ -4090,6 +6293,11 @@
                   </a:txBody>
                   <a:tcPr/>
                 </a:tc>
+                <a:extLst>
+                  <a:ext uri="{0D108BD9-81ED-4DB2-BD59-A6C34878D82A}">
+                    <a16:rowId xmlns:a16="http://schemas.microsoft.com/office/drawing/2014/main" val="10004"/>
+                  </a:ext>
+                </a:extLst>
               </a:tr>
               <a:tr h="365760">
                 <a:tc>
@@ -4140,6 +6348,11 @@
                   </a:txBody>
                   <a:tcPr/>
                 </a:tc>
+                <a:extLst>
+                  <a:ext uri="{0D108BD9-81ED-4DB2-BD59-A6C34878D82A}">
+                    <a16:rowId xmlns:a16="http://schemas.microsoft.com/office/drawing/2014/main" val="10005"/>
+                  </a:ext>
+                </a:extLst>
               </a:tr>
               <a:tr h="365760">
                 <a:tc>
@@ -4190,6 +6403,11 @@
                   </a:txBody>
                   <a:tcPr/>
                 </a:tc>
+                <a:extLst>
+                  <a:ext uri="{0D108BD9-81ED-4DB2-BD59-A6C34878D82A}">
+                    <a16:rowId xmlns:a16="http://schemas.microsoft.com/office/drawing/2014/main" val="10006"/>
+                  </a:ext>
+                </a:extLst>
               </a:tr>
             </a:tbl>
           </a:graphicData>
@@ -4312,14 +6530,11 @@
                 <a:spcPct val="115000"/>
               </a:lnSpc>
             </a:pPr>
-            <a:r>
-              <a:rPr sz="1400">
-                <a:solidFill>
-                  <a:srgbClr val="404040"/>
-                </a:solidFill>
-              </a:rPr>
-              <a:t/>
-            </a:r>
+            <a:endParaRPr sz="1400">
+              <a:solidFill>
+                <a:srgbClr val="404040"/>
+              </a:solidFill>
+            </a:endParaRPr>
           </a:p>
           <a:p>
             <a:pPr>
@@ -4483,7 +6698,7 @@
 </file>
 
 <file path=ppt/slides/slide12.xml><?xml version="1.0" encoding="utf-8"?>
-<p:sld xmlns:a="http://schemas.openxmlformats.org/drawingml/2006/main" xmlns:p="http://schemas.openxmlformats.org/presentationml/2006/main" xmlns:r="http://schemas.openxmlformats.org/officeDocument/2006/relationships">
+<p:sld xmlns:a="http://schemas.openxmlformats.org/drawingml/2006/main" xmlns:r="http://schemas.openxmlformats.org/officeDocument/2006/relationships" xmlns:p="http://schemas.openxmlformats.org/presentationml/2006/main">
   <p:cSld>
     <p:spTree>
       <p:nvGrpSpPr>
@@ -4491,7 +6706,14 @@
         <p:cNvGrpSpPr/>
         <p:nvPr/>
       </p:nvGrpSpPr>
-      <p:grpSpPr/>
+      <p:grpSpPr>
+        <a:xfrm>
+          <a:off x="0" y="0"/>
+          <a:ext cx="0" cy="0"/>
+          <a:chOff x="0" y="0"/>
+          <a:chExt cx="0" cy="0"/>
+        </a:xfrm>
+      </p:grpSpPr>
       <p:sp>
         <p:nvSpPr>
           <p:cNvPr id="2" name="TextBox 1"/>
@@ -4580,12 +6802,48 @@
                 <a:tableStyleId>{5C22544A-7EE6-4342-B048-85BDC9FD1C3A}</a:tableStyleId>
               </a:tblPr>
               <a:tblGrid>
-                <a:gridCol w="1463040"/>
-                <a:gridCol w="914400"/>
-                <a:gridCol w="914400"/>
-                <a:gridCol w="914400"/>
-                <a:gridCol w="822960"/>
-                <a:gridCol w="1097280"/>
+                <a:gridCol w="1463040">
+                  <a:extLst>
+                    <a:ext uri="{9D8B030D-6E8A-4147-A177-3AD203B41FA5}">
+                      <a16:colId xmlns:a16="http://schemas.microsoft.com/office/drawing/2014/main" val="20000"/>
+                    </a:ext>
+                  </a:extLst>
+                </a:gridCol>
+                <a:gridCol w="914400">
+                  <a:extLst>
+                    <a:ext uri="{9D8B030D-6E8A-4147-A177-3AD203B41FA5}">
+                      <a16:colId xmlns:a16="http://schemas.microsoft.com/office/drawing/2014/main" val="20001"/>
+                    </a:ext>
+                  </a:extLst>
+                </a:gridCol>
+                <a:gridCol w="914400">
+                  <a:extLst>
+                    <a:ext uri="{9D8B030D-6E8A-4147-A177-3AD203B41FA5}">
+                      <a16:colId xmlns:a16="http://schemas.microsoft.com/office/drawing/2014/main" val="20002"/>
+                    </a:ext>
+                  </a:extLst>
+                </a:gridCol>
+                <a:gridCol w="914400">
+                  <a:extLst>
+                    <a:ext uri="{9D8B030D-6E8A-4147-A177-3AD203B41FA5}">
+                      <a16:colId xmlns:a16="http://schemas.microsoft.com/office/drawing/2014/main" val="20003"/>
+                    </a:ext>
+                  </a:extLst>
+                </a:gridCol>
+                <a:gridCol w="822960">
+                  <a:extLst>
+                    <a:ext uri="{9D8B030D-6E8A-4147-A177-3AD203B41FA5}">
+                      <a16:colId xmlns:a16="http://schemas.microsoft.com/office/drawing/2014/main" val="20004"/>
+                    </a:ext>
+                  </a:extLst>
+                </a:gridCol>
+                <a:gridCol w="1097280">
+                  <a:extLst>
+                    <a:ext uri="{9D8B030D-6E8A-4147-A177-3AD203B41FA5}">
+                      <a16:colId xmlns:a16="http://schemas.microsoft.com/office/drawing/2014/main" val="20005"/>
+                    </a:ext>
+                  </a:extLst>
+                </a:gridCol>
               </a:tblGrid>
               <a:tr h="365760">
                 <a:tc>
@@ -4726,6 +6984,11 @@
                     </a:solidFill>
                   </a:tcPr>
                 </a:tc>
+                <a:extLst>
+                  <a:ext uri="{0D108BD9-81ED-4DB2-BD59-A6C34878D82A}">
+                    <a16:rowId xmlns:a16="http://schemas.microsoft.com/office/drawing/2014/main" val="10000"/>
+                  </a:ext>
+                </a:extLst>
               </a:tr>
               <a:tr h="365760">
                 <a:tc>
@@ -4824,6 +7087,11 @@
                   </a:txBody>
                   <a:tcPr/>
                 </a:tc>
+                <a:extLst>
+                  <a:ext uri="{0D108BD9-81ED-4DB2-BD59-A6C34878D82A}">
+                    <a16:rowId xmlns:a16="http://schemas.microsoft.com/office/drawing/2014/main" val="10001"/>
+                  </a:ext>
+                </a:extLst>
               </a:tr>
               <a:tr h="365760">
                 <a:tc>
@@ -4922,6 +7190,11 @@
                   </a:txBody>
                   <a:tcPr/>
                 </a:tc>
+                <a:extLst>
+                  <a:ext uri="{0D108BD9-81ED-4DB2-BD59-A6C34878D82A}">
+                    <a16:rowId xmlns:a16="http://schemas.microsoft.com/office/drawing/2014/main" val="10002"/>
+                  </a:ext>
+                </a:extLst>
               </a:tr>
               <a:tr h="365760">
                 <a:tc>
@@ -5020,6 +7293,11 @@
                   </a:txBody>
                   <a:tcPr/>
                 </a:tc>
+                <a:extLst>
+                  <a:ext uri="{0D108BD9-81ED-4DB2-BD59-A6C34878D82A}">
+                    <a16:rowId xmlns:a16="http://schemas.microsoft.com/office/drawing/2014/main" val="10003"/>
+                  </a:ext>
+                </a:extLst>
               </a:tr>
             </a:tbl>
           </a:graphicData>
@@ -5127,14 +7405,11 @@
                 <a:spcPct val="120000"/>
               </a:lnSpc>
             </a:pPr>
-            <a:r>
-              <a:rPr sz="1400">
-                <a:solidFill>
-                  <a:srgbClr val="404040"/>
-                </a:solidFill>
-              </a:rPr>
-              <a:t/>
-            </a:r>
+            <a:endParaRPr sz="1400">
+              <a:solidFill>
+                <a:srgbClr val="404040"/>
+              </a:solidFill>
+            </a:endParaRPr>
           </a:p>
           <a:p>
             <a:pPr>
@@ -5244,7 +7519,7 @@
 </file>
 
 <file path=ppt/slides/slide13.xml><?xml version="1.0" encoding="utf-8"?>
-<p:sld xmlns:a="http://schemas.openxmlformats.org/drawingml/2006/main" xmlns:p="http://schemas.openxmlformats.org/presentationml/2006/main" xmlns:r="http://schemas.openxmlformats.org/officeDocument/2006/relationships">
+<p:sld xmlns:a="http://schemas.openxmlformats.org/drawingml/2006/main" xmlns:r="http://schemas.openxmlformats.org/officeDocument/2006/relationships" xmlns:p="http://schemas.openxmlformats.org/presentationml/2006/main">
   <p:cSld>
     <p:spTree>
       <p:nvGrpSpPr>
@@ -5252,7 +7527,14 @@
         <p:cNvGrpSpPr/>
         <p:nvPr/>
       </p:nvGrpSpPr>
-      <p:grpSpPr/>
+      <p:grpSpPr>
+        <a:xfrm>
+          <a:off x="0" y="0"/>
+          <a:ext cx="0" cy="0"/>
+          <a:chOff x="0" y="0"/>
+          <a:chExt cx="0" cy="0"/>
+        </a:xfrm>
+      </p:grpSpPr>
       <p:sp>
         <p:nvSpPr>
           <p:cNvPr id="2" name="TextBox 1"/>
@@ -5634,7 +7916,7 @@
 </file>
 
 <file path=ppt/slides/slide14.xml><?xml version="1.0" encoding="utf-8"?>
-<p:sld xmlns:a="http://schemas.openxmlformats.org/drawingml/2006/main" xmlns:p="http://schemas.openxmlformats.org/presentationml/2006/main" xmlns:r="http://schemas.openxmlformats.org/officeDocument/2006/relationships">
+<p:sld xmlns:a="http://schemas.openxmlformats.org/drawingml/2006/main" xmlns:r="http://schemas.openxmlformats.org/officeDocument/2006/relationships" xmlns:p="http://schemas.openxmlformats.org/presentationml/2006/main">
   <p:cSld>
     <p:spTree>
       <p:nvGrpSpPr>
@@ -5642,7 +7924,14 @@
         <p:cNvGrpSpPr/>
         <p:nvPr/>
       </p:nvGrpSpPr>
-      <p:grpSpPr/>
+      <p:grpSpPr>
+        <a:xfrm>
+          <a:off x="0" y="0"/>
+          <a:ext cx="0" cy="0"/>
+          <a:chOff x="0" y="0"/>
+          <a:chExt cx="0" cy="0"/>
+        </a:xfrm>
+      </p:grpSpPr>
       <p:sp>
         <p:nvSpPr>
           <p:cNvPr id="2" name="TextBox 1"/>
@@ -6043,7 +8332,7 @@
 </file>
 
 <file path=ppt/slides/slide15.xml><?xml version="1.0" encoding="utf-8"?>
-<p:sld xmlns:a="http://schemas.openxmlformats.org/drawingml/2006/main" xmlns:p="http://schemas.openxmlformats.org/presentationml/2006/main" xmlns:r="http://schemas.openxmlformats.org/officeDocument/2006/relationships">
+<p:sld xmlns:a="http://schemas.openxmlformats.org/drawingml/2006/main" xmlns:r="http://schemas.openxmlformats.org/officeDocument/2006/relationships" xmlns:p="http://schemas.openxmlformats.org/presentationml/2006/main">
   <p:cSld>
     <p:spTree>
       <p:nvGrpSpPr>
@@ -6051,7 +8340,14 @@
         <p:cNvGrpSpPr/>
         <p:nvPr/>
       </p:nvGrpSpPr>
-      <p:grpSpPr/>
+      <p:grpSpPr>
+        <a:xfrm>
+          <a:off x="0" y="0"/>
+          <a:ext cx="0" cy="0"/>
+          <a:chOff x="0" y="0"/>
+          <a:chExt cx="0" cy="0"/>
+        </a:xfrm>
+      </p:grpSpPr>
       <p:sp>
         <p:nvSpPr>
           <p:cNvPr id="2" name="TextBox 1"/>
@@ -6096,7 +8392,7 @@
         <p:spPr>
           <a:xfrm>
             <a:off x="548640" y="1463040"/>
-            <a:ext cx="10972800" cy="4572000"/>
+            <a:ext cx="10972800" cy="4745915"/>
           </a:xfrm>
           <a:prstGeom prst="rect">
             <a:avLst/>
@@ -6118,7 +8414,7 @@
               </a:spcAft>
             </a:pPr>
             <a:r>
-              <a:rPr sz="1700">
+              <a:rPr sz="1700" dirty="0">
                 <a:solidFill>
                   <a:srgbClr val="404040"/>
                 </a:solidFill>
@@ -6137,7 +8433,7 @@
               </a:spcAft>
             </a:pPr>
             <a:r>
-              <a:rPr sz="1500">
+              <a:rPr sz="1500" dirty="0">
                 <a:solidFill>
                   <a:srgbClr val="404040"/>
                 </a:solidFill>
@@ -6155,15 +8451,12 @@
                 <a:spcPts val="600"/>
               </a:spcAft>
             </a:pPr>
-            <a:r>
-              <a:rPr sz="1700">
-                <a:solidFill>
-                  <a:srgbClr val="404040"/>
-                </a:solidFill>
-                <a:latin typeface="Calibri"/>
-              </a:rPr>
-              <a:t>• </a:t>
-            </a:r>
+            <a:endParaRPr sz="1700" dirty="0">
+              <a:solidFill>
+                <a:srgbClr val="404040"/>
+              </a:solidFill>
+              <a:latin typeface="Calibri"/>
+            </a:endParaRPr>
           </a:p>
           <a:p>
             <a:pPr>
@@ -6175,7 +8468,7 @@
               </a:spcAft>
             </a:pPr>
             <a:r>
-              <a:rPr sz="1700">
+              <a:rPr sz="1700" dirty="0">
                 <a:solidFill>
                   <a:srgbClr val="404040"/>
                 </a:solidFill>
@@ -6194,13 +8487,31 @@
               </a:spcAft>
             </a:pPr>
             <a:r>
-              <a:rPr sz="1500">
-                <a:solidFill>
-                  <a:srgbClr val="404040"/>
-                </a:solidFill>
-                <a:latin typeface="Calibri"/>
-              </a:rPr>
-              <a:t>– CatBoost R² = 0.6503, MAE = 0.7584, CV = 0.6266 ± 0.0093</a:t>
+              <a:rPr sz="1500" dirty="0">
+                <a:solidFill>
+                  <a:srgbClr val="404040"/>
+                </a:solidFill>
+                <a:latin typeface="Calibri"/>
+              </a:rPr>
+              <a:t>– </a:t>
+            </a:r>
+            <a:r>
+              <a:rPr sz="1500" dirty="0" err="1">
+                <a:solidFill>
+                  <a:srgbClr val="404040"/>
+                </a:solidFill>
+                <a:latin typeface="Calibri"/>
+              </a:rPr>
+              <a:t>CatBoost</a:t>
+            </a:r>
+            <a:r>
+              <a:rPr sz="1500" dirty="0">
+                <a:solidFill>
+                  <a:srgbClr val="404040"/>
+                </a:solidFill>
+                <a:latin typeface="Calibri"/>
+              </a:rPr>
+              <a:t> R² = 0.6503, MAE = 0.7584, CV = 0.6266 ± 0.0093</a:t>
             </a:r>
           </a:p>
           <a:p>
@@ -6213,7 +8524,7 @@
               </a:spcAft>
             </a:pPr>
             <a:r>
-              <a:rPr sz="1500">
+              <a:rPr sz="1500" dirty="0">
                 <a:solidFill>
                   <a:srgbClr val="404040"/>
                 </a:solidFill>
@@ -6232,7 +8543,7 @@
               </a:spcAft>
             </a:pPr>
             <a:r>
-              <a:rPr sz="1500">
+              <a:rPr sz="1500" dirty="0">
                 <a:solidFill>
                   <a:srgbClr val="404040"/>
                 </a:solidFill>
@@ -6251,7 +8562,7 @@
               </a:spcAft>
             </a:pPr>
             <a:r>
-              <a:rPr sz="1500">
+              <a:rPr sz="1500" dirty="0">
                 <a:solidFill>
                   <a:srgbClr val="404040"/>
                 </a:solidFill>
@@ -6270,7 +8581,7 @@
               </a:spcAft>
             </a:pPr>
             <a:r>
-              <a:rPr sz="1300">
+              <a:rPr sz="1300" dirty="0">
                 <a:solidFill>
                   <a:srgbClr val="404040"/>
                 </a:solidFill>
@@ -6288,15 +8599,12 @@
                 <a:spcPts val="600"/>
               </a:spcAft>
             </a:pPr>
-            <a:r>
-              <a:rPr sz="1700">
-                <a:solidFill>
-                  <a:srgbClr val="404040"/>
-                </a:solidFill>
-                <a:latin typeface="Calibri"/>
-              </a:rPr>
-              <a:t>• </a:t>
-            </a:r>
+            <a:endParaRPr sz="1700" dirty="0">
+              <a:solidFill>
+                <a:srgbClr val="404040"/>
+              </a:solidFill>
+              <a:latin typeface="Calibri"/>
+            </a:endParaRPr>
           </a:p>
           <a:p>
             <a:pPr>
@@ -6308,7 +8616,7 @@
               </a:spcAft>
             </a:pPr>
             <a:r>
-              <a:rPr sz="1700">
+              <a:rPr sz="1700" dirty="0">
                 <a:solidFill>
                   <a:srgbClr val="404040"/>
                 </a:solidFill>
@@ -6327,7 +8635,7 @@
               </a:spcAft>
             </a:pPr>
             <a:r>
-              <a:rPr sz="1500">
+              <a:rPr sz="1500" dirty="0">
                 <a:solidFill>
                   <a:srgbClr val="404040"/>
                 </a:solidFill>
@@ -6346,47 +8654,13 @@
               </a:spcAft>
             </a:pPr>
             <a:r>
-              <a:rPr sz="1500">
+              <a:rPr sz="1500" dirty="0">
                 <a:solidFill>
                   <a:srgbClr val="404040"/>
                 </a:solidFill>
                 <a:latin typeface="Calibri"/>
               </a:rPr>
               <a:t>– in clinical / wearable / longitudinal settings</a:t>
-            </a:r>
-          </a:p>
-        </p:txBody>
-      </p:sp>
-      <p:sp>
-        <p:nvSpPr>
-          <p:cNvPr id="4" name="TextBox 3"/>
-          <p:cNvSpPr txBox="1"/>
-          <p:nvPr/>
-        </p:nvSpPr>
-        <p:spPr>
-          <a:xfrm>
-            <a:off x="457200" y="5760720"/>
-            <a:ext cx="11277295" cy="731520"/>
-          </a:xfrm>
-          <a:prstGeom prst="rect">
-            <a:avLst/>
-          </a:prstGeom>
-          <a:noFill/>
-        </p:spPr>
-        <p:txBody>
-          <a:bodyPr wrap="none">
-            <a:spAutoFit/>
-          </a:bodyPr>
-          <a:lstStyle/>
-          <a:p>
-            <a:pPr algn="ctr"/>
-            <a:r>
-              <a:rPr sz="2800" b="1">
-                <a:solidFill>
-                  <a:srgbClr val="C0504D"/>
-                </a:solidFill>
-              </a:rPr>
-              <a:t>Thank you — Questions?</a:t>
             </a:r>
           </a:p>
         </p:txBody>
@@ -6467,7 +8741,7 @@
 </file>
 
 <file path=ppt/slides/slide2.xml><?xml version="1.0" encoding="utf-8"?>
-<p:sld xmlns:a="http://schemas.openxmlformats.org/drawingml/2006/main" xmlns:p="http://schemas.openxmlformats.org/presentationml/2006/main" xmlns:r="http://schemas.openxmlformats.org/officeDocument/2006/relationships">
+<p:sld xmlns:a="http://schemas.openxmlformats.org/drawingml/2006/main" xmlns:r="http://schemas.openxmlformats.org/officeDocument/2006/relationships" xmlns:p="http://schemas.openxmlformats.org/presentationml/2006/main">
   <p:cSld>
     <p:spTree>
       <p:nvGrpSpPr>
@@ -6475,7 +8749,14 @@
         <p:cNvGrpSpPr/>
         <p:nvPr/>
       </p:nvGrpSpPr>
-      <p:grpSpPr/>
+      <p:grpSpPr>
+        <a:xfrm>
+          <a:off x="0" y="0"/>
+          <a:ext cx="0" cy="0"/>
+          <a:chOff x="0" y="0"/>
+          <a:chExt cx="0" cy="0"/>
+        </a:xfrm>
+      </p:grpSpPr>
       <p:sp>
         <p:nvSpPr>
           <p:cNvPr id="2" name="TextBox 1"/>
@@ -6781,7 +9062,7 @@
 </file>
 
 <file path=ppt/slides/slide3.xml><?xml version="1.0" encoding="utf-8"?>
-<p:sld xmlns:a="http://schemas.openxmlformats.org/drawingml/2006/main" xmlns:p="http://schemas.openxmlformats.org/presentationml/2006/main" xmlns:r="http://schemas.openxmlformats.org/officeDocument/2006/relationships">
+<p:sld xmlns:a="http://schemas.openxmlformats.org/drawingml/2006/main" xmlns:r="http://schemas.openxmlformats.org/officeDocument/2006/relationships" xmlns:p="http://schemas.openxmlformats.org/presentationml/2006/main">
   <p:cSld>
     <p:spTree>
       <p:nvGrpSpPr>
@@ -6789,7 +9070,14 @@
         <p:cNvGrpSpPr/>
         <p:nvPr/>
       </p:nvGrpSpPr>
-      <p:grpSpPr/>
+      <p:grpSpPr>
+        <a:xfrm>
+          <a:off x="0" y="0"/>
+          <a:ext cx="0" cy="0"/>
+          <a:chOff x="0" y="0"/>
+          <a:chExt cx="0" cy="0"/>
+        </a:xfrm>
+      </p:grpSpPr>
       <p:sp>
         <p:nvSpPr>
           <p:cNvPr id="2" name="TextBox 1"/>
@@ -7114,7 +9402,7 @@
 </file>
 
 <file path=ppt/slides/slide4.xml><?xml version="1.0" encoding="utf-8"?>
-<p:sld xmlns:a="http://schemas.openxmlformats.org/drawingml/2006/main" xmlns:p="http://schemas.openxmlformats.org/presentationml/2006/main" xmlns:r="http://schemas.openxmlformats.org/officeDocument/2006/relationships">
+<p:sld xmlns:a="http://schemas.openxmlformats.org/drawingml/2006/main" xmlns:r="http://schemas.openxmlformats.org/officeDocument/2006/relationships" xmlns:p="http://schemas.openxmlformats.org/presentationml/2006/main">
   <p:cSld>
     <p:spTree>
       <p:nvGrpSpPr>
@@ -7122,7 +9410,14 @@
         <p:cNvGrpSpPr/>
         <p:nvPr/>
       </p:nvGrpSpPr>
-      <p:grpSpPr/>
+      <p:grpSpPr>
+        <a:xfrm>
+          <a:off x="0" y="0"/>
+          <a:ext cx="0" cy="0"/>
+          <a:chOff x="0" y="0"/>
+          <a:chExt cx="0" cy="0"/>
+        </a:xfrm>
+      </p:grpSpPr>
       <p:sp>
         <p:nvSpPr>
           <p:cNvPr id="2" name="TextBox 1"/>
@@ -7462,7 +9757,7 @@
 </file>
 
 <file path=ppt/slides/slide5.xml><?xml version="1.0" encoding="utf-8"?>
-<p:sld xmlns:a="http://schemas.openxmlformats.org/drawingml/2006/main" xmlns:p="http://schemas.openxmlformats.org/presentationml/2006/main" xmlns:r="http://schemas.openxmlformats.org/officeDocument/2006/relationships">
+<p:sld xmlns:a="http://schemas.openxmlformats.org/drawingml/2006/main" xmlns:r="http://schemas.openxmlformats.org/officeDocument/2006/relationships" xmlns:p="http://schemas.openxmlformats.org/presentationml/2006/main">
   <p:cSld>
     <p:spTree>
       <p:nvGrpSpPr>
@@ -7470,7 +9765,14 @@
         <p:cNvGrpSpPr/>
         <p:nvPr/>
       </p:nvGrpSpPr>
-      <p:grpSpPr/>
+      <p:grpSpPr>
+        <a:xfrm>
+          <a:off x="0" y="0"/>
+          <a:ext cx="0" cy="0"/>
+          <a:chOff x="0" y="0"/>
+          <a:chExt cx="0" cy="0"/>
+        </a:xfrm>
+      </p:grpSpPr>
       <p:sp>
         <p:nvSpPr>
           <p:cNvPr id="2" name="TextBox 1"/>
@@ -7576,7 +9878,7 @@
           </a:fontRef>
         </p:style>
         <p:txBody>
-          <a:bodyPr rtlCol="0" anchor="ctr" wrap="square"/>
+          <a:bodyPr wrap="square" rtlCol="0" anchor="ctr"/>
           <a:lstStyle/>
           <a:p>
             <a:pPr algn="ctr"/>
@@ -7683,6 +9985,7 @@
           <a:lstStyle/>
           <a:p>
             <a:pPr algn="ctr"/>
+            <a:endParaRPr/>
           </a:p>
         </p:txBody>
       </p:sp>
@@ -7722,7 +10025,7 @@
           </a:fontRef>
         </p:style>
         <p:txBody>
-          <a:bodyPr rtlCol="0" anchor="ctr" wrap="square"/>
+          <a:bodyPr wrap="square" rtlCol="0" anchor="ctr"/>
           <a:lstStyle/>
           <a:p>
             <a:pPr algn="ctr"/>
@@ -7828,6 +10131,7 @@
           <a:lstStyle/>
           <a:p>
             <a:pPr algn="ctr"/>
+            <a:endParaRPr/>
           </a:p>
         </p:txBody>
       </p:sp>
@@ -7867,7 +10171,7 @@
           </a:fontRef>
         </p:style>
         <p:txBody>
-          <a:bodyPr rtlCol="0" anchor="ctr" wrap="square"/>
+          <a:bodyPr wrap="square" rtlCol="0" anchor="ctr"/>
           <a:lstStyle/>
           <a:p>
             <a:pPr algn="ctr"/>
@@ -7974,6 +10278,7 @@
           <a:lstStyle/>
           <a:p>
             <a:pPr algn="ctr"/>
+            <a:endParaRPr/>
           </a:p>
         </p:txBody>
       </p:sp>
@@ -8013,7 +10318,7 @@
           </a:fontRef>
         </p:style>
         <p:txBody>
-          <a:bodyPr rtlCol="0" anchor="ctr" wrap="square"/>
+          <a:bodyPr wrap="square" rtlCol="0" anchor="ctr"/>
           <a:lstStyle/>
           <a:p>
             <a:pPr algn="ctr"/>
@@ -8191,7 +10496,7 @@
 </file>
 
 <file path=ppt/slides/slide6.xml><?xml version="1.0" encoding="utf-8"?>
-<p:sld xmlns:a="http://schemas.openxmlformats.org/drawingml/2006/main" xmlns:p="http://schemas.openxmlformats.org/presentationml/2006/main" xmlns:r="http://schemas.openxmlformats.org/officeDocument/2006/relationships">
+<p:sld xmlns:a="http://schemas.openxmlformats.org/drawingml/2006/main" xmlns:r="http://schemas.openxmlformats.org/officeDocument/2006/relationships" xmlns:p="http://schemas.openxmlformats.org/presentationml/2006/main">
   <p:cSld>
     <p:spTree>
       <p:nvGrpSpPr>
@@ -8199,7 +10504,14 @@
         <p:cNvGrpSpPr/>
         <p:nvPr/>
       </p:nvGrpSpPr>
-      <p:grpSpPr/>
+      <p:grpSpPr>
+        <a:xfrm>
+          <a:off x="0" y="0"/>
+          <a:ext cx="0" cy="0"/>
+          <a:chOff x="0" y="0"/>
+          <a:chExt cx="0" cy="0"/>
+        </a:xfrm>
+      </p:grpSpPr>
       <p:sp>
         <p:nvSpPr>
           <p:cNvPr id="2" name="TextBox 1"/>
@@ -8581,7 +10893,7 @@
 </file>
 
 <file path=ppt/slides/slide7.xml><?xml version="1.0" encoding="utf-8"?>
-<p:sld xmlns:a="http://schemas.openxmlformats.org/drawingml/2006/main" xmlns:p="http://schemas.openxmlformats.org/presentationml/2006/main" xmlns:r="http://schemas.openxmlformats.org/officeDocument/2006/relationships">
+<p:sld xmlns:a="http://schemas.openxmlformats.org/drawingml/2006/main" xmlns:r="http://schemas.openxmlformats.org/officeDocument/2006/relationships" xmlns:p="http://schemas.openxmlformats.org/presentationml/2006/main">
   <p:cSld>
     <p:spTree>
       <p:nvGrpSpPr>
@@ -8589,7 +10901,14 @@
         <p:cNvGrpSpPr/>
         <p:nvPr/>
       </p:nvGrpSpPr>
-      <p:grpSpPr/>
+      <p:grpSpPr>
+        <a:xfrm>
+          <a:off x="0" y="0"/>
+          <a:ext cx="0" cy="0"/>
+          <a:chOff x="0" y="0"/>
+          <a:chExt cx="0" cy="0"/>
+        </a:xfrm>
+      </p:grpSpPr>
       <p:sp>
         <p:nvSpPr>
           <p:cNvPr id="2" name="TextBox 1"/>
@@ -8678,10 +10997,34 @@
                 <a:tableStyleId>{5C22544A-7EE6-4342-B048-85BDC9FD1C3A}</a:tableStyleId>
               </a:tblPr>
               <a:tblGrid>
-                <a:gridCol w="1645920"/>
-                <a:gridCol w="914400"/>
-                <a:gridCol w="914400"/>
-                <a:gridCol w="914400"/>
+                <a:gridCol w="1645920">
+                  <a:extLst>
+                    <a:ext uri="{9D8B030D-6E8A-4147-A177-3AD203B41FA5}">
+                      <a16:colId xmlns:a16="http://schemas.microsoft.com/office/drawing/2014/main" val="20000"/>
+                    </a:ext>
+                  </a:extLst>
+                </a:gridCol>
+                <a:gridCol w="914400">
+                  <a:extLst>
+                    <a:ext uri="{9D8B030D-6E8A-4147-A177-3AD203B41FA5}">
+                      <a16:colId xmlns:a16="http://schemas.microsoft.com/office/drawing/2014/main" val="20001"/>
+                    </a:ext>
+                  </a:extLst>
+                </a:gridCol>
+                <a:gridCol w="914400">
+                  <a:extLst>
+                    <a:ext uri="{9D8B030D-6E8A-4147-A177-3AD203B41FA5}">
+                      <a16:colId xmlns:a16="http://schemas.microsoft.com/office/drawing/2014/main" val="20002"/>
+                    </a:ext>
+                  </a:extLst>
+                </a:gridCol>
+                <a:gridCol w="914400">
+                  <a:extLst>
+                    <a:ext uri="{9D8B030D-6E8A-4147-A177-3AD203B41FA5}">
+                      <a16:colId xmlns:a16="http://schemas.microsoft.com/office/drawing/2014/main" val="20003"/>
+                    </a:ext>
+                  </a:extLst>
+                </a:gridCol>
               </a:tblGrid>
               <a:tr h="365760">
                 <a:tc>
@@ -8776,6 +11119,11 @@
                     </a:solidFill>
                   </a:tcPr>
                 </a:tc>
+                <a:extLst>
+                  <a:ext uri="{0D108BD9-81ED-4DB2-BD59-A6C34878D82A}">
+                    <a16:rowId xmlns:a16="http://schemas.microsoft.com/office/drawing/2014/main" val="10000"/>
+                  </a:ext>
+                </a:extLst>
               </a:tr>
               <a:tr h="365760">
                 <a:tc>
@@ -8842,6 +11190,11 @@
                   </a:txBody>
                   <a:tcPr/>
                 </a:tc>
+                <a:extLst>
+                  <a:ext uri="{0D108BD9-81ED-4DB2-BD59-A6C34878D82A}">
+                    <a16:rowId xmlns:a16="http://schemas.microsoft.com/office/drawing/2014/main" val="10001"/>
+                  </a:ext>
+                </a:extLst>
               </a:tr>
               <a:tr h="365760">
                 <a:tc>
@@ -8908,6 +11261,11 @@
                   </a:txBody>
                   <a:tcPr/>
                 </a:tc>
+                <a:extLst>
+                  <a:ext uri="{0D108BD9-81ED-4DB2-BD59-A6C34878D82A}">
+                    <a16:rowId xmlns:a16="http://schemas.microsoft.com/office/drawing/2014/main" val="10002"/>
+                  </a:ext>
+                </a:extLst>
               </a:tr>
               <a:tr h="365760">
                 <a:tc>
@@ -8974,6 +11332,11 @@
                   </a:txBody>
                   <a:tcPr/>
                 </a:tc>
+                <a:extLst>
+                  <a:ext uri="{0D108BD9-81ED-4DB2-BD59-A6C34878D82A}">
+                    <a16:rowId xmlns:a16="http://schemas.microsoft.com/office/drawing/2014/main" val="10003"/>
+                  </a:ext>
+                </a:extLst>
               </a:tr>
             </a:tbl>
           </a:graphicData>
@@ -9051,13 +11414,25 @@
                 <a:spcPct val="120000"/>
               </a:lnSpc>
             </a:pPr>
+            <a:endParaRPr sz="1500">
+              <a:solidFill>
+                <a:srgbClr val="404040"/>
+              </a:solidFill>
+            </a:endParaRPr>
+          </a:p>
+          <a:p>
+            <a:pPr>
+              <a:lnSpc>
+                <a:spcPct val="120000"/>
+              </a:lnSpc>
+            </a:pPr>
             <a:r>
               <a:rPr sz="1500">
                 <a:solidFill>
                   <a:srgbClr val="404040"/>
                 </a:solidFill>
               </a:rPr>
-              <a:t/>
+              <a:t>5-Fold Cross-Validation (on CatBoost):</a:t>
             </a:r>
           </a:p>
           <a:p>
@@ -9072,7 +11447,7 @@
                   <a:srgbClr val="404040"/>
                 </a:solidFill>
               </a:rPr>
-              <a:t>5-Fold Cross-Validation (on CatBoost):</a:t>
+              <a:t>  R² = 0.6266 ± 0.0093 (very stable)</a:t>
             </a:r>
           </a:p>
           <a:p>
@@ -9081,29 +11456,11 @@
                 <a:spcPct val="120000"/>
               </a:lnSpc>
             </a:pPr>
-            <a:r>
-              <a:rPr sz="1500">
-                <a:solidFill>
-                  <a:srgbClr val="404040"/>
-                </a:solidFill>
-              </a:rPr>
-              <a:t>  R² = 0.6266 ± 0.0093 (very stable)</a:t>
-            </a:r>
-          </a:p>
-          <a:p>
-            <a:pPr>
-              <a:lnSpc>
-                <a:spcPct val="120000"/>
-              </a:lnSpc>
-            </a:pPr>
-            <a:r>
-              <a:rPr sz="1500">
-                <a:solidFill>
-                  <a:srgbClr val="404040"/>
-                </a:solidFill>
-              </a:rPr>
-              <a:t/>
-            </a:r>
+            <a:endParaRPr sz="1500">
+              <a:solidFill>
+                <a:srgbClr val="404040"/>
+              </a:solidFill>
+            </a:endParaRPr>
           </a:p>
           <a:p>
             <a:pPr>
@@ -9237,7 +11594,7 @@
 </file>
 
 <file path=ppt/slides/slide8.xml><?xml version="1.0" encoding="utf-8"?>
-<p:sld xmlns:a="http://schemas.openxmlformats.org/drawingml/2006/main" xmlns:p="http://schemas.openxmlformats.org/presentationml/2006/main" xmlns:r="http://schemas.openxmlformats.org/officeDocument/2006/relationships">
+<p:sld xmlns:a="http://schemas.openxmlformats.org/drawingml/2006/main" xmlns:r="http://schemas.openxmlformats.org/officeDocument/2006/relationships" xmlns:p="http://schemas.openxmlformats.org/presentationml/2006/main">
   <p:cSld>
     <p:spTree>
       <p:nvGrpSpPr>
@@ -9245,7 +11602,14 @@
         <p:cNvGrpSpPr/>
         <p:nvPr/>
       </p:nvGrpSpPr>
-      <p:grpSpPr/>
+      <p:grpSpPr>
+        <a:xfrm>
+          <a:off x="0" y="0"/>
+          <a:ext cx="0" cy="0"/>
+          <a:chOff x="0" y="0"/>
+          <a:chExt cx="0" cy="0"/>
+        </a:xfrm>
+      </p:grpSpPr>
       <p:sp>
         <p:nvSpPr>
           <p:cNvPr id="2" name="TextBox 1"/>
@@ -9324,7 +11688,7 @@
         <p:spPr>
           <a:xfrm>
             <a:off x="457200" y="1371600"/>
-            <a:ext cx="5943600" cy="4572000"/>
+            <a:ext cx="5943600" cy="4364913"/>
           </a:xfrm>
           <a:prstGeom prst="rect">
             <a:avLst/>
@@ -9346,13 +11710,49 @@
               </a:spcAft>
             </a:pPr>
             <a:r>
-              <a:rPr sz="1400">
-                <a:solidFill>
-                  <a:srgbClr val="404040"/>
-                </a:solidFill>
-                <a:latin typeface="Calibri"/>
-              </a:rPr>
-              <a:t>• TreeExplainer on CatBoost (2000-sample test subset)</a:t>
+              <a:rPr sz="1400" dirty="0">
+                <a:solidFill>
+                  <a:srgbClr val="404040"/>
+                </a:solidFill>
+                <a:latin typeface="Calibri"/>
+              </a:rPr>
+              <a:t>• </a:t>
+            </a:r>
+            <a:r>
+              <a:rPr sz="1400" dirty="0" err="1">
+                <a:solidFill>
+                  <a:srgbClr val="404040"/>
+                </a:solidFill>
+                <a:latin typeface="Calibri"/>
+              </a:rPr>
+              <a:t>TreeExplainer</a:t>
+            </a:r>
+            <a:r>
+              <a:rPr sz="1400" dirty="0">
+                <a:solidFill>
+                  <a:srgbClr val="404040"/>
+                </a:solidFill>
+                <a:latin typeface="Calibri"/>
+              </a:rPr>
+              <a:t> on </a:t>
+            </a:r>
+            <a:r>
+              <a:rPr sz="1400" dirty="0" err="1">
+                <a:solidFill>
+                  <a:srgbClr val="404040"/>
+                </a:solidFill>
+                <a:latin typeface="Calibri"/>
+              </a:rPr>
+              <a:t>CatBoost</a:t>
+            </a:r>
+            <a:r>
+              <a:rPr sz="1400" dirty="0">
+                <a:solidFill>
+                  <a:srgbClr val="404040"/>
+                </a:solidFill>
+                <a:latin typeface="Calibri"/>
+              </a:rPr>
+              <a:t> (2000-sample test subset)</a:t>
             </a:r>
           </a:p>
           <a:p>
@@ -9365,13 +11765,31 @@
               </a:spcAft>
             </a:pPr>
             <a:r>
-              <a:rPr sz="1200">
-                <a:solidFill>
-                  <a:srgbClr val="404040"/>
-                </a:solidFill>
-                <a:latin typeface="Calibri"/>
-              </a:rPr>
-              <a:t>– Global summary (bar + beeswarm)</a:t>
+              <a:rPr sz="1200" dirty="0">
+                <a:solidFill>
+                  <a:srgbClr val="404040"/>
+                </a:solidFill>
+                <a:latin typeface="Calibri"/>
+              </a:rPr>
+              <a:t>– Global summary (bar + </a:t>
+            </a:r>
+            <a:r>
+              <a:rPr sz="1200" dirty="0" err="1">
+                <a:solidFill>
+                  <a:srgbClr val="404040"/>
+                </a:solidFill>
+                <a:latin typeface="Calibri"/>
+              </a:rPr>
+              <a:t>beeswarm</a:t>
+            </a:r>
+            <a:r>
+              <a:rPr sz="1200" dirty="0">
+                <a:solidFill>
+                  <a:srgbClr val="404040"/>
+                </a:solidFill>
+                <a:latin typeface="Calibri"/>
+              </a:rPr>
+              <a:t>)</a:t>
             </a:r>
           </a:p>
           <a:p>
@@ -9384,7 +11802,7 @@
               </a:spcAft>
             </a:pPr>
             <a:r>
-              <a:rPr sz="1200">
+              <a:rPr sz="1200" dirty="0">
                 <a:solidFill>
                   <a:srgbClr val="404040"/>
                 </a:solidFill>
@@ -9402,15 +11820,12 @@
                 <a:spcPts val="600"/>
               </a:spcAft>
             </a:pPr>
-            <a:r>
-              <a:rPr sz="1400">
-                <a:solidFill>
-                  <a:srgbClr val="404040"/>
-                </a:solidFill>
-                <a:latin typeface="Calibri"/>
-              </a:rPr>
-              <a:t>• </a:t>
-            </a:r>
+            <a:endParaRPr sz="1400" dirty="0">
+              <a:solidFill>
+                <a:srgbClr val="404040"/>
+              </a:solidFill>
+              <a:latin typeface="Calibri"/>
+            </a:endParaRPr>
           </a:p>
           <a:p>
             <a:pPr>
@@ -9422,7 +11837,7 @@
               </a:spcAft>
             </a:pPr>
             <a:r>
-              <a:rPr sz="1400">
+              <a:rPr sz="1400" dirty="0">
                 <a:solidFill>
                   <a:srgbClr val="404040"/>
                 </a:solidFill>
@@ -9441,13 +11856,31 @@
               </a:spcAft>
             </a:pPr>
             <a:r>
-              <a:rPr sz="1200">
-                <a:solidFill>
-                  <a:srgbClr val="404040"/>
-                </a:solidFill>
-                <a:latin typeface="Calibri"/>
-              </a:rPr>
-              <a:t>– sleep_quality_score (0.660)</a:t>
+              <a:rPr sz="1200" dirty="0">
+                <a:solidFill>
+                  <a:srgbClr val="404040"/>
+                </a:solidFill>
+                <a:latin typeface="Calibri"/>
+              </a:rPr>
+              <a:t>– </a:t>
+            </a:r>
+            <a:r>
+              <a:rPr sz="1200" dirty="0" err="1">
+                <a:solidFill>
+                  <a:srgbClr val="404040"/>
+                </a:solidFill>
+                <a:latin typeface="Calibri"/>
+              </a:rPr>
+              <a:t>sleep_quality_score</a:t>
+            </a:r>
+            <a:r>
+              <a:rPr sz="1200" dirty="0">
+                <a:solidFill>
+                  <a:srgbClr val="404040"/>
+                </a:solidFill>
+                <a:latin typeface="Calibri"/>
+              </a:rPr>
+              <a:t> (0.660)</a:t>
             </a:r>
           </a:p>
           <a:p>
@@ -9460,7 +11893,7 @@
               </a:spcAft>
             </a:pPr>
             <a:r>
-              <a:rPr sz="1200">
+              <a:rPr sz="1200" dirty="0">
                 <a:solidFill>
                   <a:srgbClr val="404040"/>
                 </a:solidFill>
@@ -9479,13 +11912,31 @@
               </a:spcAft>
             </a:pPr>
             <a:r>
-              <a:rPr sz="1200">
-                <a:solidFill>
-                  <a:srgbClr val="404040"/>
-                </a:solidFill>
-                <a:latin typeface="Calibri"/>
-              </a:rPr>
-              <a:t>– sleep_duration_hrs (0.133)</a:t>
+              <a:rPr sz="1200" dirty="0">
+                <a:solidFill>
+                  <a:srgbClr val="404040"/>
+                </a:solidFill>
+                <a:latin typeface="Calibri"/>
+              </a:rPr>
+              <a:t>– </a:t>
+            </a:r>
+            <a:r>
+              <a:rPr sz="1200" dirty="0" err="1">
+                <a:solidFill>
+                  <a:srgbClr val="404040"/>
+                </a:solidFill>
+                <a:latin typeface="Calibri"/>
+              </a:rPr>
+              <a:t>sleep_duration_hrs</a:t>
+            </a:r>
+            <a:r>
+              <a:rPr sz="1200" dirty="0">
+                <a:solidFill>
+                  <a:srgbClr val="404040"/>
+                </a:solidFill>
+                <a:latin typeface="Calibri"/>
+              </a:rPr>
+              <a:t> (0.133)</a:t>
             </a:r>
           </a:p>
           <a:p>
@@ -9497,15 +11948,12 @@
                 <a:spcPts val="600"/>
               </a:spcAft>
             </a:pPr>
-            <a:r>
-              <a:rPr sz="1400">
-                <a:solidFill>
-                  <a:srgbClr val="404040"/>
-                </a:solidFill>
-                <a:latin typeface="Calibri"/>
-              </a:rPr>
-              <a:t>• </a:t>
-            </a:r>
+            <a:endParaRPr sz="1400" dirty="0">
+              <a:solidFill>
+                <a:srgbClr val="404040"/>
+              </a:solidFill>
+              <a:latin typeface="Calibri"/>
+            </a:endParaRPr>
           </a:p>
           <a:p>
             <a:pPr>
@@ -9517,7 +11965,7 @@
               </a:spcAft>
             </a:pPr>
             <a:r>
-              <a:rPr sz="1400">
+              <a:rPr sz="1400" dirty="0">
                 <a:solidFill>
                   <a:srgbClr val="404040"/>
                 </a:solidFill>
@@ -9536,13 +11984,31 @@
               </a:spcAft>
             </a:pPr>
             <a:r>
-              <a:rPr sz="1200">
-                <a:solidFill>
-                  <a:srgbClr val="404040"/>
-                </a:solidFill>
-                <a:latin typeface="Calibri"/>
-              </a:rPr>
-              <a:t>– sleep_quality ↓ ⇒ stress ↑: r = −0.996</a:t>
+              <a:rPr sz="1200" dirty="0">
+                <a:solidFill>
+                  <a:srgbClr val="404040"/>
+                </a:solidFill>
+                <a:latin typeface="Calibri"/>
+              </a:rPr>
+              <a:t>– </a:t>
+            </a:r>
+            <a:r>
+              <a:rPr sz="1200" dirty="0" err="1">
+                <a:solidFill>
+                  <a:srgbClr val="404040"/>
+                </a:solidFill>
+                <a:latin typeface="Calibri"/>
+              </a:rPr>
+              <a:t>sleep_quality</a:t>
+            </a:r>
+            <a:r>
+              <a:rPr sz="1200" dirty="0">
+                <a:solidFill>
+                  <a:srgbClr val="404040"/>
+                </a:solidFill>
+                <a:latin typeface="Calibri"/>
+              </a:rPr>
+              <a:t> ↓ ⇒ stress ↑: r = −0.996</a:t>
             </a:r>
           </a:p>
           <a:p>
@@ -9555,13 +12021,31 @@
               </a:spcAft>
             </a:pPr>
             <a:r>
-              <a:rPr sz="1200">
-                <a:solidFill>
-                  <a:srgbClr val="404040"/>
-                </a:solidFill>
-                <a:latin typeface="Calibri"/>
-              </a:rPr>
-              <a:t>– wake_episodes ↑ ⇒ stress ↑: r = −0.981</a:t>
+              <a:rPr sz="1200" dirty="0">
+                <a:solidFill>
+                  <a:srgbClr val="404040"/>
+                </a:solidFill>
+                <a:latin typeface="Calibri"/>
+              </a:rPr>
+              <a:t>– </a:t>
+            </a:r>
+            <a:r>
+              <a:rPr sz="1200" dirty="0" err="1">
+                <a:solidFill>
+                  <a:srgbClr val="404040"/>
+                </a:solidFill>
+                <a:latin typeface="Calibri"/>
+              </a:rPr>
+              <a:t>wake_episodes</a:t>
+            </a:r>
+            <a:r>
+              <a:rPr sz="1200" dirty="0">
+                <a:solidFill>
+                  <a:srgbClr val="404040"/>
+                </a:solidFill>
+                <a:latin typeface="Calibri"/>
+              </a:rPr>
+              <a:t> ↑ ⇒ stress ↑: r = −0.981</a:t>
             </a:r>
           </a:p>
           <a:p>
@@ -9574,13 +12058,31 @@
               </a:spcAft>
             </a:pPr>
             <a:r>
-              <a:rPr sz="1200">
-                <a:solidFill>
-                  <a:srgbClr val="404040"/>
-                </a:solidFill>
-                <a:latin typeface="Calibri"/>
-              </a:rPr>
-              <a:t>– heart_rate_resting ↑ ⇒ stress ↑: r = +0.974</a:t>
+              <a:rPr sz="1200" dirty="0">
+                <a:solidFill>
+                  <a:srgbClr val="404040"/>
+                </a:solidFill>
+                <a:latin typeface="Calibri"/>
+              </a:rPr>
+              <a:t>– </a:t>
+            </a:r>
+            <a:r>
+              <a:rPr sz="1200" dirty="0" err="1">
+                <a:solidFill>
+                  <a:srgbClr val="404040"/>
+                </a:solidFill>
+                <a:latin typeface="Calibri"/>
+              </a:rPr>
+              <a:t>heart_rate_resting</a:t>
+            </a:r>
+            <a:r>
+              <a:rPr sz="1200" dirty="0">
+                <a:solidFill>
+                  <a:srgbClr val="404040"/>
+                </a:solidFill>
+                <a:latin typeface="Calibri"/>
+              </a:rPr>
+              <a:t> ↑ ⇒ stress ↑: r = +0.974</a:t>
             </a:r>
           </a:p>
           <a:p>
@@ -9593,7 +12095,7 @@
               </a:spcAft>
             </a:pPr>
             <a:r>
-              <a:rPr sz="1200">
+              <a:rPr sz="1200" dirty="0">
                 <a:solidFill>
                   <a:srgbClr val="404040"/>
                 </a:solidFill>
@@ -9704,7 +12206,7 @@
 </file>
 
 <file path=ppt/slides/slide9.xml><?xml version="1.0" encoding="utf-8"?>
-<p:sld xmlns:a="http://schemas.openxmlformats.org/drawingml/2006/main" xmlns:p="http://schemas.openxmlformats.org/presentationml/2006/main" xmlns:r="http://schemas.openxmlformats.org/officeDocument/2006/relationships">
+<p:sld xmlns:a="http://schemas.openxmlformats.org/drawingml/2006/main" xmlns:r="http://schemas.openxmlformats.org/officeDocument/2006/relationships" xmlns:p="http://schemas.openxmlformats.org/presentationml/2006/main">
   <p:cSld>
     <p:spTree>
       <p:nvGrpSpPr>
@@ -9712,7 +12214,14 @@
         <p:cNvGrpSpPr/>
         <p:nvPr/>
       </p:nvGrpSpPr>
-      <p:grpSpPr/>
+      <p:grpSpPr>
+        <a:xfrm>
+          <a:off x="0" y="0"/>
+          <a:ext cx="0" cy="0"/>
+          <a:chOff x="0" y="0"/>
+          <a:chExt cx="0" cy="0"/>
+        </a:xfrm>
+      </p:grpSpPr>
       <p:sp>
         <p:nvSpPr>
           <p:cNvPr id="2" name="TextBox 1"/>
@@ -9813,13 +12322,49 @@
               </a:spcAft>
             </a:pPr>
             <a:r>
-              <a:rPr sz="1500">
-                <a:solidFill>
-                  <a:srgbClr val="404040"/>
-                </a:solidFill>
-                <a:latin typeface="Calibri"/>
-              </a:rPr>
-              <a:t>• DiCE genetic algorithm, model_type='regressor'</a:t>
+              <a:rPr sz="1500" dirty="0">
+                <a:solidFill>
+                  <a:srgbClr val="404040"/>
+                </a:solidFill>
+                <a:latin typeface="Calibri"/>
+              </a:rPr>
+              <a:t>• </a:t>
+            </a:r>
+            <a:r>
+              <a:rPr sz="1500" dirty="0" err="1">
+                <a:solidFill>
+                  <a:srgbClr val="404040"/>
+                </a:solidFill>
+                <a:latin typeface="Calibri"/>
+              </a:rPr>
+              <a:t>DiCE</a:t>
+            </a:r>
+            <a:r>
+              <a:rPr sz="1500" dirty="0">
+                <a:solidFill>
+                  <a:srgbClr val="404040"/>
+                </a:solidFill>
+                <a:latin typeface="Calibri"/>
+              </a:rPr>
+              <a:t> genetic algorithm, </a:t>
+            </a:r>
+            <a:r>
+              <a:rPr sz="1500" dirty="0" err="1">
+                <a:solidFill>
+                  <a:srgbClr val="404040"/>
+                </a:solidFill>
+                <a:latin typeface="Calibri"/>
+              </a:rPr>
+              <a:t>model_type</a:t>
+            </a:r>
+            <a:r>
+              <a:rPr sz="1500" dirty="0">
+                <a:solidFill>
+                  <a:srgbClr val="404040"/>
+                </a:solidFill>
+                <a:latin typeface="Calibri"/>
+              </a:rPr>
+              <a:t>='regressor'</a:t>
             </a:r>
           </a:p>
           <a:p>
@@ -9831,15 +12376,12 @@
                 <a:spcPts val="600"/>
               </a:spcAft>
             </a:pPr>
-            <a:r>
-              <a:rPr sz="1500">
-                <a:solidFill>
-                  <a:srgbClr val="404040"/>
-                </a:solidFill>
-                <a:latin typeface="Calibri"/>
-              </a:rPr>
-              <a:t>• </a:t>
-            </a:r>
+            <a:endParaRPr sz="1500" dirty="0">
+              <a:solidFill>
+                <a:srgbClr val="404040"/>
+              </a:solidFill>
+              <a:latin typeface="Calibri"/>
+            </a:endParaRPr>
           </a:p>
           <a:p>
             <a:pPr>
@@ -9851,7 +12393,7 @@
               </a:spcAft>
             </a:pPr>
             <a:r>
-              <a:rPr sz="1500">
+              <a:rPr sz="1500" dirty="0">
                 <a:solidFill>
                   <a:srgbClr val="404040"/>
                 </a:solidFill>
@@ -9870,13 +12412,67 @@
               </a:spcAft>
             </a:pPr>
             <a:r>
-              <a:rPr sz="1300">
-                <a:solidFill>
-                  <a:srgbClr val="404040"/>
-                </a:solidFill>
-                <a:latin typeface="Calibri"/>
-              </a:rPr>
-              <a:t>– BEHAVIOR (varyable): sleep_duration_hrs, screen_time, caffeine,</a:t>
+              <a:rPr sz="1300" dirty="0">
+                <a:solidFill>
+                  <a:srgbClr val="404040"/>
+                </a:solidFill>
+                <a:latin typeface="Calibri"/>
+              </a:rPr>
+              <a:t>– BEHAVIOR (</a:t>
+            </a:r>
+            <a:r>
+              <a:rPr sz="1300" dirty="0" err="1">
+                <a:solidFill>
+                  <a:srgbClr val="404040"/>
+                </a:solidFill>
+                <a:latin typeface="Calibri"/>
+              </a:rPr>
+              <a:t>varyable</a:t>
+            </a:r>
+            <a:r>
+              <a:rPr sz="1300" dirty="0">
+                <a:solidFill>
+                  <a:srgbClr val="404040"/>
+                </a:solidFill>
+                <a:latin typeface="Calibri"/>
+              </a:rPr>
+              <a:t>): </a:t>
+            </a:r>
+            <a:r>
+              <a:rPr sz="1300" dirty="0" err="1">
+                <a:solidFill>
+                  <a:srgbClr val="404040"/>
+                </a:solidFill>
+                <a:latin typeface="Calibri"/>
+              </a:rPr>
+              <a:t>sleep_duration_hrs</a:t>
+            </a:r>
+            <a:r>
+              <a:rPr sz="1300" dirty="0">
+                <a:solidFill>
+                  <a:srgbClr val="404040"/>
+                </a:solidFill>
+                <a:latin typeface="Calibri"/>
+              </a:rPr>
+              <a:t>, </a:t>
+            </a:r>
+            <a:r>
+              <a:rPr sz="1300" dirty="0" err="1">
+                <a:solidFill>
+                  <a:srgbClr val="404040"/>
+                </a:solidFill>
+                <a:latin typeface="Calibri"/>
+              </a:rPr>
+              <a:t>screen_time</a:t>
+            </a:r>
+            <a:r>
+              <a:rPr sz="1300" dirty="0">
+                <a:solidFill>
+                  <a:srgbClr val="404040"/>
+                </a:solidFill>
+                <a:latin typeface="Calibri"/>
+              </a:rPr>
+              <a:t>, caffeine,</a:t>
             </a:r>
           </a:p>
           <a:p>
@@ -9889,14 +12485,47 @@
               </a:spcAft>
             </a:pPr>
             <a:r>
-              <a:rPr sz="1100">
-                <a:solidFill>
-                  <a:srgbClr val="404040"/>
-                </a:solidFill>
-                <a:latin typeface="Calibri"/>
-              </a:rPr>
-              <a:t>– alcohol, exercise, steps, nap, room_temp, sleep_aid</a:t>
-            </a:r>
+              <a:rPr sz="1100" dirty="0">
+                <a:solidFill>
+                  <a:srgbClr val="404040"/>
+                </a:solidFill>
+                <a:latin typeface="Calibri"/>
+              </a:rPr>
+              <a:t>– alcohol, exercise, steps, nap, </a:t>
+            </a:r>
+            <a:r>
+              <a:rPr sz="1100" dirty="0" err="1">
+                <a:solidFill>
+                  <a:srgbClr val="404040"/>
+                </a:solidFill>
+                <a:latin typeface="Calibri"/>
+              </a:rPr>
+              <a:t>room_temp</a:t>
+            </a:r>
+            <a:r>
+              <a:rPr sz="1100" dirty="0">
+                <a:solidFill>
+                  <a:srgbClr val="404040"/>
+                </a:solidFill>
+                <a:latin typeface="Calibri"/>
+              </a:rPr>
+              <a:t>, </a:t>
+            </a:r>
+            <a:r>
+              <a:rPr sz="1100" dirty="0" err="1">
+                <a:solidFill>
+                  <a:srgbClr val="404040"/>
+                </a:solidFill>
+                <a:latin typeface="Calibri"/>
+              </a:rPr>
+              <a:t>sleep_aid</a:t>
+            </a:r>
+            <a:endParaRPr sz="1100" dirty="0">
+              <a:solidFill>
+                <a:srgbClr val="404040"/>
+              </a:solidFill>
+              <a:latin typeface="Calibri"/>
+            </a:endParaRPr>
           </a:p>
           <a:p>
             <a:pPr lvl="1">
@@ -9908,13 +12537,49 @@
               </a:spcAft>
             </a:pPr>
             <a:r>
-              <a:rPr sz="1300">
-                <a:solidFill>
-                  <a:srgbClr val="404040"/>
-                </a:solidFill>
-                <a:latin typeface="Calibri"/>
-              </a:rPr>
-              <a:t>– OUTCOME (locked): sleep_quality_score, REM%, wake_episodes,</a:t>
+              <a:rPr sz="1300" dirty="0">
+                <a:solidFill>
+                  <a:srgbClr val="404040"/>
+                </a:solidFill>
+                <a:latin typeface="Calibri"/>
+              </a:rPr>
+              <a:t>– OUTCOME (locked): </a:t>
+            </a:r>
+            <a:r>
+              <a:rPr sz="1300" dirty="0" err="1">
+                <a:solidFill>
+                  <a:srgbClr val="404040"/>
+                </a:solidFill>
+                <a:latin typeface="Calibri"/>
+              </a:rPr>
+              <a:t>sleep_quality_score</a:t>
+            </a:r>
+            <a:r>
+              <a:rPr sz="1300" dirty="0">
+                <a:solidFill>
+                  <a:srgbClr val="404040"/>
+                </a:solidFill>
+                <a:latin typeface="Calibri"/>
+              </a:rPr>
+              <a:t>, REM%, </a:t>
+            </a:r>
+            <a:r>
+              <a:rPr sz="1300" dirty="0" err="1">
+                <a:solidFill>
+                  <a:srgbClr val="404040"/>
+                </a:solidFill>
+                <a:latin typeface="Calibri"/>
+              </a:rPr>
+              <a:t>wake_episodes</a:t>
+            </a:r>
+            <a:r>
+              <a:rPr sz="1300" dirty="0">
+                <a:solidFill>
+                  <a:srgbClr val="404040"/>
+                </a:solidFill>
+                <a:latin typeface="Calibri"/>
+              </a:rPr>
+              <a:t>,</a:t>
             </a:r>
           </a:p>
           <a:p>
@@ -9927,14 +12592,65 @@
               </a:spcAft>
             </a:pPr>
             <a:r>
-              <a:rPr sz="1100">
-                <a:solidFill>
-                  <a:srgbClr val="404040"/>
-                </a:solidFill>
-                <a:latin typeface="Calibri"/>
-              </a:rPr>
-              <a:t>– sleep_latency, deep_sleep%, heart_rate_resting</a:t>
-            </a:r>
+              <a:rPr sz="1100" dirty="0">
+                <a:solidFill>
+                  <a:srgbClr val="404040"/>
+                </a:solidFill>
+                <a:latin typeface="Calibri"/>
+              </a:rPr>
+              <a:t>– </a:t>
+            </a:r>
+            <a:r>
+              <a:rPr sz="1100" dirty="0" err="1">
+                <a:solidFill>
+                  <a:srgbClr val="404040"/>
+                </a:solidFill>
+                <a:latin typeface="Calibri"/>
+              </a:rPr>
+              <a:t>sleep_latency</a:t>
+            </a:r>
+            <a:r>
+              <a:rPr sz="1100" dirty="0">
+                <a:solidFill>
+                  <a:srgbClr val="404040"/>
+                </a:solidFill>
+                <a:latin typeface="Calibri"/>
+              </a:rPr>
+              <a:t>, </a:t>
+            </a:r>
+            <a:r>
+              <a:rPr sz="1100" dirty="0" err="1">
+                <a:solidFill>
+                  <a:srgbClr val="404040"/>
+                </a:solidFill>
+                <a:latin typeface="Calibri"/>
+              </a:rPr>
+              <a:t>deep_sleep</a:t>
+            </a:r>
+            <a:r>
+              <a:rPr sz="1100" dirty="0">
+                <a:solidFill>
+                  <a:srgbClr val="404040"/>
+                </a:solidFill>
+                <a:latin typeface="Calibri"/>
+              </a:rPr>
+              <a:t>%, </a:t>
+            </a:r>
+            <a:r>
+              <a:rPr sz="1100" dirty="0" err="1">
+                <a:solidFill>
+                  <a:srgbClr val="404040"/>
+                </a:solidFill>
+                <a:latin typeface="Calibri"/>
+              </a:rPr>
+              <a:t>heart_rate_resting</a:t>
+            </a:r>
+            <a:endParaRPr sz="1100" dirty="0">
+              <a:solidFill>
+                <a:srgbClr val="404040"/>
+              </a:solidFill>
+              <a:latin typeface="Calibri"/>
+            </a:endParaRPr>
           </a:p>
           <a:p>
             <a:pPr lvl="1">
@@ -9946,13 +12662,31 @@
               </a:spcAft>
             </a:pPr>
             <a:r>
-              <a:rPr sz="1300">
-                <a:solidFill>
-                  <a:srgbClr val="404040"/>
-                </a:solidFill>
-                <a:latin typeface="Calibri"/>
-              </a:rPr>
-              <a:t>– IMMUTABLE (locked): age, gender, occupation, bmi, etc.</a:t>
+              <a:rPr sz="1300" dirty="0">
+                <a:solidFill>
+                  <a:srgbClr val="404040"/>
+                </a:solidFill>
+                <a:latin typeface="Calibri"/>
+              </a:rPr>
+              <a:t>– IMMUTABLE (locked): age, gender, occupation, </a:t>
+            </a:r>
+            <a:r>
+              <a:rPr sz="1300" dirty="0" err="1">
+                <a:solidFill>
+                  <a:srgbClr val="404040"/>
+                </a:solidFill>
+                <a:latin typeface="Calibri"/>
+              </a:rPr>
+              <a:t>bmi</a:t>
+            </a:r>
+            <a:r>
+              <a:rPr sz="1300" dirty="0">
+                <a:solidFill>
+                  <a:srgbClr val="404040"/>
+                </a:solidFill>
+                <a:latin typeface="Calibri"/>
+              </a:rPr>
+              <a:t>, etc.</a:t>
             </a:r>
           </a:p>
           <a:p>
@@ -9964,15 +12698,12 @@
                 <a:spcPts val="600"/>
               </a:spcAft>
             </a:pPr>
-            <a:r>
-              <a:rPr sz="1500">
-                <a:solidFill>
-                  <a:srgbClr val="404040"/>
-                </a:solidFill>
-                <a:latin typeface="Calibri"/>
-              </a:rPr>
-              <a:t>• </a:t>
-            </a:r>
+            <a:endParaRPr sz="1500" dirty="0">
+              <a:solidFill>
+                <a:srgbClr val="404040"/>
+              </a:solidFill>
+              <a:latin typeface="Calibri"/>
+            </a:endParaRPr>
           </a:p>
           <a:p>
             <a:pPr>
@@ -9984,13 +12715,31 @@
               </a:spcAft>
             </a:pPr>
             <a:r>
-              <a:rPr sz="1500">
-                <a:solidFill>
-                  <a:srgbClr val="404040"/>
-                </a:solidFill>
-                <a:latin typeface="Calibri"/>
-              </a:rPr>
-              <a:t>• permitted_range (safety constraints) — examples:</a:t>
+              <a:rPr sz="1500" dirty="0">
+                <a:solidFill>
+                  <a:srgbClr val="404040"/>
+                </a:solidFill>
+                <a:latin typeface="Calibri"/>
+              </a:rPr>
+              <a:t>• </a:t>
+            </a:r>
+            <a:r>
+              <a:rPr sz="1500" dirty="0" err="1">
+                <a:solidFill>
+                  <a:srgbClr val="404040"/>
+                </a:solidFill>
+                <a:latin typeface="Calibri"/>
+              </a:rPr>
+              <a:t>permitted_range</a:t>
+            </a:r>
+            <a:r>
+              <a:rPr sz="1500" dirty="0">
+                <a:solidFill>
+                  <a:srgbClr val="404040"/>
+                </a:solidFill>
+                <a:latin typeface="Calibri"/>
+              </a:rPr>
+              <a:t> (safety constraints) — examples:</a:t>
             </a:r>
           </a:p>
           <a:p>
@@ -10003,13 +12752,31 @@
               </a:spcAft>
             </a:pPr>
             <a:r>
-              <a:rPr sz="1300">
-                <a:solidFill>
-                  <a:srgbClr val="404040"/>
-                </a:solidFill>
-                <a:latin typeface="Calibri"/>
-              </a:rPr>
-              <a:t>– sleep_duration_hrs ∈ [4.0, 10.0] hours</a:t>
+              <a:rPr sz="1300" dirty="0">
+                <a:solidFill>
+                  <a:srgbClr val="404040"/>
+                </a:solidFill>
+                <a:latin typeface="Calibri"/>
+              </a:rPr>
+              <a:t>– </a:t>
+            </a:r>
+            <a:r>
+              <a:rPr sz="1300" dirty="0" err="1">
+                <a:solidFill>
+                  <a:srgbClr val="404040"/>
+                </a:solidFill>
+                <a:latin typeface="Calibri"/>
+              </a:rPr>
+              <a:t>sleep_duration_hrs</a:t>
+            </a:r>
+            <a:r>
+              <a:rPr sz="1300" dirty="0">
+                <a:solidFill>
+                  <a:srgbClr val="404040"/>
+                </a:solidFill>
+                <a:latin typeface="Calibri"/>
+              </a:rPr>
+              <a:t> ∈ [4.0, 10.0] hours</a:t>
             </a:r>
           </a:p>
           <a:p>
@@ -10022,13 +12789,31 @@
               </a:spcAft>
             </a:pPr>
             <a:r>
-              <a:rPr sz="1300">
-                <a:solidFill>
-                  <a:srgbClr val="404040"/>
-                </a:solidFill>
-                <a:latin typeface="Calibri"/>
-              </a:rPr>
-              <a:t>– caffeine_mg_before_bed ∈ [0, 400] mg</a:t>
+              <a:rPr sz="1300" dirty="0">
+                <a:solidFill>
+                  <a:srgbClr val="404040"/>
+                </a:solidFill>
+                <a:latin typeface="Calibri"/>
+              </a:rPr>
+              <a:t>– </a:t>
+            </a:r>
+            <a:r>
+              <a:rPr sz="1300" dirty="0" err="1">
+                <a:solidFill>
+                  <a:srgbClr val="404040"/>
+                </a:solidFill>
+                <a:latin typeface="Calibri"/>
+              </a:rPr>
+              <a:t>caffeine_mg_before_bed</a:t>
+            </a:r>
+            <a:r>
+              <a:rPr sz="1300" dirty="0">
+                <a:solidFill>
+                  <a:srgbClr val="404040"/>
+                </a:solidFill>
+                <a:latin typeface="Calibri"/>
+              </a:rPr>
+              <a:t> ∈ [0, 400] mg</a:t>
             </a:r>
           </a:p>
           <a:p>
@@ -10041,13 +12826,31 @@
               </a:spcAft>
             </a:pPr>
             <a:r>
-              <a:rPr sz="1300">
-                <a:solidFill>
-                  <a:srgbClr val="404040"/>
-                </a:solidFill>
-                <a:latin typeface="Calibri"/>
-              </a:rPr>
-              <a:t>– alcohol_units_before_bed locked at [0, 0]</a:t>
+              <a:rPr sz="1300" dirty="0">
+                <a:solidFill>
+                  <a:srgbClr val="404040"/>
+                </a:solidFill>
+                <a:latin typeface="Calibri"/>
+              </a:rPr>
+              <a:t>– </a:t>
+            </a:r>
+            <a:r>
+              <a:rPr sz="1300" dirty="0" err="1">
+                <a:solidFill>
+                  <a:srgbClr val="404040"/>
+                </a:solidFill>
+                <a:latin typeface="Calibri"/>
+              </a:rPr>
+              <a:t>alcohol_units_before_bed</a:t>
+            </a:r>
+            <a:r>
+              <a:rPr sz="1300" dirty="0">
+                <a:solidFill>
+                  <a:srgbClr val="404040"/>
+                </a:solidFill>
+                <a:latin typeface="Calibri"/>
+              </a:rPr>
+              <a:t> locked at [0, 0]</a:t>
             </a:r>
           </a:p>
           <a:p>
@@ -10060,13 +12863,31 @@
               </a:spcAft>
             </a:pPr>
             <a:r>
-              <a:rPr sz="1300">
-                <a:solidFill>
-                  <a:srgbClr val="404040"/>
-                </a:solidFill>
-                <a:latin typeface="Calibri"/>
-              </a:rPr>
-              <a:t>– steps_that_day ∈ [1000, 15000]</a:t>
+              <a:rPr sz="1300" dirty="0">
+                <a:solidFill>
+                  <a:srgbClr val="404040"/>
+                </a:solidFill>
+                <a:latin typeface="Calibri"/>
+              </a:rPr>
+              <a:t>– </a:t>
+            </a:r>
+            <a:r>
+              <a:rPr sz="1300" dirty="0" err="1">
+                <a:solidFill>
+                  <a:srgbClr val="404040"/>
+                </a:solidFill>
+                <a:latin typeface="Calibri"/>
+              </a:rPr>
+              <a:t>steps_that_day</a:t>
+            </a:r>
+            <a:r>
+              <a:rPr sz="1300" dirty="0">
+                <a:solidFill>
+                  <a:srgbClr val="404040"/>
+                </a:solidFill>
+                <a:latin typeface="Calibri"/>
+              </a:rPr>
+              <a:t> ∈ [1000, 15000]</a:t>
             </a:r>
           </a:p>
         </p:txBody>
@@ -10464,4 +13285,324 @@
   </a:objectDefaults>
   <a:extraClrSchemeLst/>
 </a:theme>
+</file>
+
+<file path=ppt/theme/theme2.xml><?xml version="1.0" encoding="utf-8"?>
+<a:theme xmlns:a="http://schemas.openxmlformats.org/drawingml/2006/main" name="Office Theme">
+  <a:themeElements>
+    <a:clrScheme name="Office">
+      <a:dk1>
+        <a:sysClr val="windowText" lastClr="000000"/>
+      </a:dk1>
+      <a:lt1>
+        <a:sysClr val="window" lastClr="FFFFFF"/>
+      </a:lt1>
+      <a:dk2>
+        <a:srgbClr val="1F497D"/>
+      </a:dk2>
+      <a:lt2>
+        <a:srgbClr val="EEECE1"/>
+      </a:lt2>
+      <a:accent1>
+        <a:srgbClr val="4F81BD"/>
+      </a:accent1>
+      <a:accent2>
+        <a:srgbClr val="C0504D"/>
+      </a:accent2>
+      <a:accent3>
+        <a:srgbClr val="9BBB59"/>
+      </a:accent3>
+      <a:accent4>
+        <a:srgbClr val="8064A2"/>
+      </a:accent4>
+      <a:accent5>
+        <a:srgbClr val="4BACC6"/>
+      </a:accent5>
+      <a:accent6>
+        <a:srgbClr val="F79646"/>
+      </a:accent6>
+      <a:hlink>
+        <a:srgbClr val="0000FF"/>
+      </a:hlink>
+      <a:folHlink>
+        <a:srgbClr val="800080"/>
+      </a:folHlink>
+    </a:clrScheme>
+    <a:fontScheme name="Office">
+      <a:majorFont>
+        <a:latin typeface="Calibri"/>
+        <a:ea typeface=""/>
+        <a:cs typeface=""/>
+        <a:font script="Jpan" typeface="ＭＳ Ｐゴシック"/>
+        <a:font script="Hang" typeface="맑은 고딕"/>
+        <a:font script="Hans" typeface="宋体"/>
+        <a:font script="Hant" typeface="新細明體"/>
+        <a:font script="Arab" typeface="Times New Roman"/>
+        <a:font script="Hebr" typeface="Times New Roman"/>
+        <a:font script="Thai" typeface="Angsana New"/>
+        <a:font script="Ethi" typeface="Nyala"/>
+        <a:font script="Beng" typeface="Vrinda"/>
+        <a:font script="Gujr" typeface="Shruti"/>
+        <a:font script="Khmr" typeface="MoolBoran"/>
+        <a:font script="Knda" typeface="Tunga"/>
+        <a:font script="Guru" typeface="Raavi"/>
+        <a:font script="Cans" typeface="Euphemia"/>
+        <a:font script="Cher" typeface="Plantagenet Cherokee"/>
+        <a:font script="Yiii" typeface="Microsoft Yi Baiti"/>
+        <a:font script="Tibt" typeface="Microsoft Himalaya"/>
+        <a:font script="Thaa" typeface="MV Boli"/>
+        <a:font script="Deva" typeface="Mangal"/>
+        <a:font script="Telu" typeface="Gautami"/>
+        <a:font script="Taml" typeface="Latha"/>
+        <a:font script="Syrc" typeface="Estrangelo Edessa"/>
+        <a:font script="Orya" typeface="Kalinga"/>
+        <a:font script="Mlym" typeface="Kartika"/>
+        <a:font script="Laoo" typeface="DokChampa"/>
+        <a:font script="Sinh" typeface="Iskoola Pota"/>
+        <a:font script="Mong" typeface="Mongolian Baiti"/>
+        <a:font script="Viet" typeface="Times New Roman"/>
+        <a:font script="Uigh" typeface="Microsoft Uighur"/>
+        <a:font script="Geor" typeface="Sylfaen"/>
+      </a:majorFont>
+      <a:minorFont>
+        <a:latin typeface="Calibri"/>
+        <a:ea typeface=""/>
+        <a:cs typeface=""/>
+        <a:font script="Jpan" typeface="ＭＳ Ｐゴシック"/>
+        <a:font script="Hang" typeface="맑은 고딕"/>
+        <a:font script="Hans" typeface="宋体"/>
+        <a:font script="Hant" typeface="新細明體"/>
+        <a:font script="Arab" typeface="Arial"/>
+        <a:font script="Hebr" typeface="Arial"/>
+        <a:font script="Thai" typeface="Cordia New"/>
+        <a:font script="Ethi" typeface="Nyala"/>
+        <a:font script="Beng" typeface="Vrinda"/>
+        <a:font script="Gujr" typeface="Shruti"/>
+        <a:font script="Khmr" typeface="DaunPenh"/>
+        <a:font script="Knda" typeface="Tunga"/>
+        <a:font script="Guru" typeface="Raavi"/>
+        <a:font script="Cans" typeface="Euphemia"/>
+        <a:font script="Cher" typeface="Plantagenet Cherokee"/>
+        <a:font script="Yiii" typeface="Microsoft Yi Baiti"/>
+        <a:font script="Tibt" typeface="Microsoft Himalaya"/>
+        <a:font script="Thaa" typeface="MV Boli"/>
+        <a:font script="Deva" typeface="Mangal"/>
+        <a:font script="Telu" typeface="Gautami"/>
+        <a:font script="Taml" typeface="Latha"/>
+        <a:font script="Syrc" typeface="Estrangelo Edessa"/>
+        <a:font script="Orya" typeface="Kalinga"/>
+        <a:font script="Mlym" typeface="Kartika"/>
+        <a:font script="Laoo" typeface="DokChampa"/>
+        <a:font script="Sinh" typeface="Iskoola Pota"/>
+        <a:font script="Mong" typeface="Mongolian Baiti"/>
+        <a:font script="Viet" typeface="Arial"/>
+        <a:font script="Uigh" typeface="Microsoft Uighur"/>
+        <a:font script="Geor" typeface="Sylfaen"/>
+      </a:minorFont>
+    </a:fontScheme>
+    <a:fmtScheme name="Office">
+      <a:fillStyleLst>
+        <a:solidFill>
+          <a:schemeClr val="phClr"/>
+        </a:solidFill>
+        <a:gradFill rotWithShape="1">
+          <a:gsLst>
+            <a:gs pos="0">
+              <a:schemeClr val="phClr">
+                <a:tint val="50000"/>
+                <a:satMod val="300000"/>
+              </a:schemeClr>
+            </a:gs>
+            <a:gs pos="35000">
+              <a:schemeClr val="phClr">
+                <a:tint val="37000"/>
+                <a:satMod val="300000"/>
+              </a:schemeClr>
+            </a:gs>
+            <a:gs pos="100000">
+              <a:schemeClr val="phClr">
+                <a:tint val="15000"/>
+                <a:satMod val="350000"/>
+              </a:schemeClr>
+            </a:gs>
+          </a:gsLst>
+          <a:lin ang="16200000" scaled="1"/>
+        </a:gradFill>
+        <a:gradFill rotWithShape="1">
+          <a:gsLst>
+            <a:gs pos="0">
+              <a:schemeClr val="phClr">
+                <a:tint val="100000"/>
+                <a:shade val="100000"/>
+                <a:satMod val="130000"/>
+              </a:schemeClr>
+            </a:gs>
+            <a:gs pos="100000">
+              <a:schemeClr val="phClr">
+                <a:tint val="50000"/>
+                <a:shade val="100000"/>
+                <a:satMod val="350000"/>
+              </a:schemeClr>
+            </a:gs>
+          </a:gsLst>
+          <a:lin ang="16200000" scaled="0"/>
+        </a:gradFill>
+      </a:fillStyleLst>
+      <a:lnStyleLst>
+        <a:ln w="9525" cap="flat" cmpd="sng" algn="ctr">
+          <a:solidFill>
+            <a:schemeClr val="phClr">
+              <a:shade val="95000"/>
+              <a:satMod val="105000"/>
+            </a:schemeClr>
+          </a:solidFill>
+          <a:prstDash val="solid"/>
+        </a:ln>
+        <a:ln w="25400" cap="flat" cmpd="sng" algn="ctr">
+          <a:solidFill>
+            <a:schemeClr val="phClr"/>
+          </a:solidFill>
+          <a:prstDash val="solid"/>
+        </a:ln>
+        <a:ln w="38100" cap="flat" cmpd="sng" algn="ctr">
+          <a:solidFill>
+            <a:schemeClr val="phClr"/>
+          </a:solidFill>
+          <a:prstDash val="solid"/>
+        </a:ln>
+      </a:lnStyleLst>
+      <a:effectStyleLst>
+        <a:effectStyle>
+          <a:effectLst>
+            <a:outerShdw blurRad="40000" dist="20000" dir="5400000" rotWithShape="0">
+              <a:srgbClr val="000000">
+                <a:alpha val="38000"/>
+              </a:srgbClr>
+            </a:outerShdw>
+          </a:effectLst>
+        </a:effectStyle>
+        <a:effectStyle>
+          <a:effectLst>
+            <a:outerShdw blurRad="40000" dist="23000" dir="5400000" rotWithShape="0">
+              <a:srgbClr val="000000">
+                <a:alpha val="35000"/>
+              </a:srgbClr>
+            </a:outerShdw>
+          </a:effectLst>
+        </a:effectStyle>
+        <a:effectStyle>
+          <a:effectLst>
+            <a:outerShdw blurRad="40000" dist="23000" dir="5400000" rotWithShape="0">
+              <a:srgbClr val="000000">
+                <a:alpha val="35000"/>
+              </a:srgbClr>
+            </a:outerShdw>
+          </a:effectLst>
+          <a:scene3d>
+            <a:camera prst="orthographicFront">
+              <a:rot lat="0" lon="0" rev="0"/>
+            </a:camera>
+            <a:lightRig rig="threePt" dir="t">
+              <a:rot lat="0" lon="0" rev="1200000"/>
+            </a:lightRig>
+          </a:scene3d>
+          <a:sp3d>
+            <a:bevelT w="63500" h="25400"/>
+          </a:sp3d>
+        </a:effectStyle>
+      </a:effectStyleLst>
+      <a:bgFillStyleLst>
+        <a:solidFill>
+          <a:schemeClr val="phClr"/>
+        </a:solidFill>
+        <a:gradFill rotWithShape="1">
+          <a:gsLst>
+            <a:gs pos="0">
+              <a:schemeClr val="phClr">
+                <a:tint val="40000"/>
+                <a:satMod val="350000"/>
+              </a:schemeClr>
+            </a:gs>
+            <a:gs pos="40000">
+              <a:schemeClr val="phClr">
+                <a:tint val="45000"/>
+                <a:shade val="99000"/>
+                <a:satMod val="350000"/>
+              </a:schemeClr>
+            </a:gs>
+            <a:gs pos="100000">
+              <a:schemeClr val="phClr">
+                <a:shade val="20000"/>
+                <a:satMod val="255000"/>
+              </a:schemeClr>
+            </a:gs>
+          </a:gsLst>
+          <a:path path="circle">
+            <a:fillToRect l="50000" t="-80000" r="50000" b="180000"/>
+          </a:path>
+        </a:gradFill>
+        <a:gradFill rotWithShape="1">
+          <a:gsLst>
+            <a:gs pos="0">
+              <a:schemeClr val="phClr">
+                <a:tint val="80000"/>
+                <a:satMod val="300000"/>
+              </a:schemeClr>
+            </a:gs>
+            <a:gs pos="100000">
+              <a:schemeClr val="phClr">
+                <a:shade val="30000"/>
+                <a:satMod val="200000"/>
+              </a:schemeClr>
+            </a:gs>
+          </a:gsLst>
+          <a:path path="circle">
+            <a:fillToRect l="50000" t="50000" r="50000" b="50000"/>
+          </a:path>
+        </a:gradFill>
+      </a:bgFillStyleLst>
+    </a:fmtScheme>
+  </a:themeElements>
+  <a:objectDefaults>
+    <a:spDef>
+      <a:spPr/>
+      <a:bodyPr/>
+      <a:lstStyle/>
+      <a:style>
+        <a:lnRef idx="1">
+          <a:schemeClr val="accent1"/>
+        </a:lnRef>
+        <a:fillRef idx="3">
+          <a:schemeClr val="accent1"/>
+        </a:fillRef>
+        <a:effectRef idx="2">
+          <a:schemeClr val="accent1"/>
+        </a:effectRef>
+        <a:fontRef idx="minor">
+          <a:schemeClr val="lt1"/>
+        </a:fontRef>
+      </a:style>
+    </a:spDef>
+    <a:lnDef>
+      <a:spPr/>
+      <a:bodyPr/>
+      <a:lstStyle/>
+      <a:style>
+        <a:lnRef idx="2">
+          <a:schemeClr val="accent1"/>
+        </a:lnRef>
+        <a:fillRef idx="0">
+          <a:schemeClr val="accent1"/>
+        </a:fillRef>
+        <a:effectRef idx="1">
+          <a:schemeClr val="accent1"/>
+        </a:effectRef>
+        <a:fontRef idx="minor">
+          <a:schemeClr val="tx1"/>
+        </a:fontRef>
+      </a:style>
+    </a:lnDef>
+  </a:objectDefaults>
+  <a:extraClrSchemeLst/>
+</a:theme>
 </file>